--- a/assets/TCS302/Unit-2/Lecture16_Creation_Traversal_Searching.pptx
+++ b/assets/TCS302/Unit-2/Lecture16_Creation_Traversal_Searching.pptx
@@ -4,6 +4,9 @@
   <p:sldMasterIdLst>
     <p:sldMasterId id="2147483648" r:id="rId1"/>
   </p:sldMasterIdLst>
+  <p:notesMasterIdLst>
+    <p:notesMasterId r:id="rId14"/>
+  </p:notesMasterIdLst>
   <p:sldIdLst>
     <p:sldId id="256" r:id="rId2"/>
     <p:sldId id="257" r:id="rId3"/>
@@ -18,10 +21,7 @@
     <p:sldId id="266" r:id="rId12"/>
     <p:sldId id="267" r:id="rId13"/>
   </p:sldIdLst>
-  <p:notesMasterIdLst>
-    <p:notesMasterId r:id="rId14"/>
-  </p:notesMasterIdLst>
-  <p:sldSz cx="9144000" cy="5143500"/>
+  <p:sldSz cx="9144000" cy="5143500" type="screen16x9"/>
   <p:notesSz cx="5143500" cy="9144000"/>
   <p:defaultTextStyle>
     <a:lvl1pPr marL="0" algn="l" defTabSz="914400" rtl="0" eaLnBrk="1" latinLnBrk="0" hangingPunct="1">
@@ -115,6 +115,11 @@
       </a:defRPr>
     </a:lvl9pPr>
   </p:defaultTextStyle>
+  <p:extLst>
+    <p:ext uri="{EFAFB233-063F-42B5-8137-9DF3F51BA10A}">
+      <p15:sldGuideLst xmlns:p15="http://schemas.microsoft.com/office/powerpoint/2012/main"/>
+    </p:ext>
+  </p:extLst>
 </p:presentation>
 </file>
 
@@ -140,234 +145,10 @@
           <a:chExt cx="0" cy="0"/>
         </a:xfrm>
       </p:grpSpPr>
-      <p:sp>
-        <p:nvSpPr>
-          <p:cNvPr id="2" name="Header Placeholder 1"/>
-          <p:cNvSpPr>
-            <a:spLocks noGrp="1"/>
-          </p:cNvSpPr>
-          <p:nvPr>
-            <p:ph type="hdr" sz="quarter"/>
-          </p:nvPr>
-        </p:nvSpPr>
-        <p:spPr>
-          <a:xfrm>
-            <a:off x="0" y="0"/>
-            <a:ext cx="2971800" cy="458788"/>
-          </a:xfrm>
-          <a:prstGeom prst="rect">
-            <a:avLst/>
-          </a:prstGeom>
-        </p:spPr>
-        <p:txBody>
-          <a:bodyPr vert="horz" lIns="91440" tIns="45720" rIns="91440" bIns="45720" rtlCol="0"/>
-          <a:lstStyle>
-            <a:lvl1pPr algn="l">
-              <a:defRPr sz="1200"/>
-            </a:lvl1pPr>
-          </a:lstStyle>
-          <a:p>
-            <a:endParaRPr lang="en-US"/>
-          </a:p>
-        </p:txBody>
-      </p:sp>
-      <p:sp>
-        <p:nvSpPr>
-          <p:cNvPr id="3" name="Date Placeholder 2"/>
-          <p:cNvSpPr>
-            <a:spLocks noGrp="1"/>
-          </p:cNvSpPr>
-          <p:nvPr>
-            <p:ph type="dt" idx="1"/>
-          </p:nvPr>
-        </p:nvSpPr>
-        <p:spPr>
-          <a:xfrm>
-            <a:off x="3884613" y="0"/>
-            <a:ext cx="2971800" cy="458788"/>
-          </a:xfrm>
-          <a:prstGeom prst="rect">
-            <a:avLst/>
-          </a:prstGeom>
-        </p:spPr>
-        <p:txBody>
-          <a:bodyPr vert="horz" lIns="91440" tIns="45720" rIns="91440" bIns="45720" rtlCol="0"/>
-          <a:lstStyle>
-            <a:lvl1pPr algn="r">
-              <a:defRPr sz="1200"/>
-            </a:lvl1pPr>
-          </a:lstStyle>
-          <a:p>
-            <a:fld id="{5282F153-3F37-0F45-9E97-73ACFA13230C}" type="datetimeFigureOut">
-              <a:rPr lang="en-US"/>
-              <a:t>7/23/19</a:t>
-            </a:fld>
-            <a:endParaRPr lang="en-US"/>
-          </a:p>
-        </p:txBody>
-      </p:sp>
-      <p:sp>
-        <p:nvSpPr>
-          <p:cNvPr id="4" name="Slide Image Placeholder 3"/>
-          <p:cNvSpPr>
-            <a:spLocks noGrp="1" noRot="1" noChangeAspect="1"/>
-          </p:cNvSpPr>
-          <p:nvPr>
-            <p:ph type="sldImg" idx="2"/>
-          </p:nvPr>
-        </p:nvSpPr>
-        <p:spPr>
-          <a:xfrm>
-            <a:off x="685800" y="1143000"/>
-            <a:ext cx="5486400" cy="3086100"/>
-          </a:xfrm>
-          <a:prstGeom prst="rect">
-            <a:avLst/>
-          </a:prstGeom>
-          <a:noFill/>
-          <a:ln w="12700">
-            <a:solidFill>
-              <a:prstClr val="black"/>
-            </a:solidFill>
-          </a:ln>
-        </p:spPr>
-        <p:txBody>
-          <a:bodyPr vert="horz" lIns="91440" tIns="45720" rIns="91440" bIns="45720" rtlCol="0" anchor="ctr"/>
-          <a:lstStyle/>
-          <a:p>
-            <a:endParaRPr lang="en-US"/>
-          </a:p>
-        </p:txBody>
-      </p:sp>
-      <p:sp>
-        <p:nvSpPr>
-          <p:cNvPr id="5" name="Notes Placeholder 4"/>
-          <p:cNvSpPr>
-            <a:spLocks noGrp="1"/>
-          </p:cNvSpPr>
-          <p:nvPr>
-            <p:ph type="body" sz="quarter" idx="3"/>
-          </p:nvPr>
-        </p:nvSpPr>
-        <p:spPr>
-          <a:xfrm>
-            <a:off x="685800" y="4400550"/>
-            <a:ext cx="5486400" cy="3600450"/>
-          </a:xfrm>
-          <a:prstGeom prst="rect">
-            <a:avLst/>
-          </a:prstGeom>
-        </p:spPr>
-        <p:txBody>
-          <a:bodyPr vert="horz" lIns="91440" tIns="45720" rIns="91440" bIns="45720" rtlCol="0"/>
-          <a:lstStyle/>
-          <a:p>
-            <a:pPr lvl="0"/>
-            <a:r>
-              <a:rPr lang="en-US"/>
-              <a:t>Click to edit Master text styles</a:t>
-            </a:r>
-          </a:p>
-          <a:p>
-            <a:pPr lvl="1"/>
-            <a:r>
-              <a:rPr lang="en-US"/>
-              <a:t>Second level</a:t>
-            </a:r>
-          </a:p>
-          <a:p>
-            <a:pPr lvl="2"/>
-            <a:r>
-              <a:rPr lang="en-US"/>
-              <a:t>Third level</a:t>
-            </a:r>
-          </a:p>
-          <a:p>
-            <a:pPr lvl="3"/>
-            <a:r>
-              <a:rPr lang="en-US"/>
-              <a:t>Fourth level</a:t>
-            </a:r>
-          </a:p>
-          <a:p>
-            <a:pPr lvl="4"/>
-            <a:r>
-              <a:rPr lang="en-US"/>
-              <a:t>Fifth level</a:t>
-            </a:r>
-          </a:p>
-        </p:txBody>
-      </p:sp>
-      <p:sp>
-        <p:nvSpPr>
-          <p:cNvPr id="6" name="Footer Placeholder 5"/>
-          <p:cNvSpPr>
-            <a:spLocks noGrp="1"/>
-          </p:cNvSpPr>
-          <p:nvPr>
-            <p:ph type="ftr" sz="quarter" idx="4"/>
-          </p:nvPr>
-        </p:nvSpPr>
-        <p:spPr>
-          <a:xfrm>
-            <a:off x="0" y="8685213"/>
-            <a:ext cx="2971800" cy="458787"/>
-          </a:xfrm>
-          <a:prstGeom prst="rect">
-            <a:avLst/>
-          </a:prstGeom>
-        </p:spPr>
-        <p:txBody>
-          <a:bodyPr vert="horz" lIns="91440" tIns="45720" rIns="91440" bIns="45720" rtlCol="0" anchor="b"/>
-          <a:lstStyle>
-            <a:lvl1pPr algn="l">
-              <a:defRPr sz="1200"/>
-            </a:lvl1pPr>
-          </a:lstStyle>
-          <a:p>
-            <a:endParaRPr lang="en-US"/>
-          </a:p>
-        </p:txBody>
-      </p:sp>
-      <p:sp>
-        <p:nvSpPr>
-          <p:cNvPr id="7" name="Slide Number Placeholder 6"/>
-          <p:cNvSpPr>
-            <a:spLocks noGrp="1"/>
-          </p:cNvSpPr>
-          <p:nvPr>
-            <p:ph type="sldNum" sz="quarter" idx="5"/>
-          </p:nvPr>
-        </p:nvSpPr>
-        <p:spPr>
-          <a:xfrm>
-            <a:off x="3884613" y="8685213"/>
-            <a:ext cx="2971800" cy="458787"/>
-          </a:xfrm>
-          <a:prstGeom prst="rect">
-            <a:avLst/>
-          </a:prstGeom>
-        </p:spPr>
-        <p:txBody>
-          <a:bodyPr vert="horz" lIns="91440" tIns="45720" rIns="91440" bIns="45720" rtlCol="0" anchor="b"/>
-          <a:lstStyle>
-            <a:lvl1pPr algn="r">
-              <a:defRPr sz="1200"/>
-            </a:lvl1pPr>
-          </a:lstStyle>
-          <a:p>
-            <a:fld id="{CE5E9CC1-C706-0F49-92D6-E571CC5EEA8F}" type="slidenum">
-              <a:rPr lang="en-US"/>
-              <a:t>‹#›</a:t>
-            </a:fld>
-            <a:endParaRPr lang="en-US"/>
-          </a:p>
-        </p:txBody>
-      </p:sp>
     </p:spTree>
     <p:extLst>
       <p:ext uri="{BB962C8B-B14F-4D97-AF65-F5344CB8AC3E}">
-        <p14:creationId xmlns:p14="http://schemas.microsoft.com/office/powerpoint/2010/main" val="1024086991"/>
+        <p14:creationId xmlns:p14="http://schemas.microsoft.com/office/powerpoint/2010/main" val="1593248179"/>
       </p:ext>
     </p:extLst>
   </p:cSld>
@@ -515,7 +296,6 @@
               <a:rPr lang="en-US" dirty="0"/>
               <a:t>Lecture 15 built a 3-node list with three separate hand-written malloc blocks. Today that repetition becomes a loop — the natural next step once a pattern repeats enough times.</a:t>
             </a:r>
-            <a:endParaRPr lang="en-US" dirty="0"/>
           </a:p>
         </p:txBody>
       </p:sp>
@@ -603,7 +383,6 @@
               <a:rPr lang="en-US" dirty="0"/>
               <a:t>Five nodes built entirely by the loop from Lecture 16, then both the traversal and search functions exercised on it. This slide is the payoff — everything since slide 3 has been building toward this one demonstration.</a:t>
             </a:r>
-            <a:endParaRPr lang="en-US" dirty="0"/>
           </a:p>
         </p:txBody>
       </p:sp>
@@ -691,7 +470,6 @@
               <a:rPr lang="en-US" dirty="0"/>
               <a:t>Good discussion closer: what stayed exactly the same between the two lectures (the struct, the linking line, the traversal loop) versus what is genuinely new (the loop wrapper, the tail pointer).</a:t>
             </a:r>
-            <a:endParaRPr lang="en-US" dirty="0"/>
           </a:p>
         </p:txBody>
       </p:sp>
@@ -779,7 +557,6 @@
               <a:rPr lang="en-US" dirty="0"/>
               <a:t>Exit ticket answer: only 'node-&gt;data = i * 10;' changes, to 'scanf("%d", &amp;node-&gt;data);' — everything else (the head/tail logic, the loop structure) stays identical. Good confidence-builder showing how little of the algorithm actually depends on WHERE the data comes from.</a:t>
             </a:r>
-            <a:endParaRPr lang="en-US" dirty="0"/>
           </a:p>
         </p:txBody>
       </p:sp>
@@ -867,7 +644,6 @@
               <a:rPr lang="en-US" dirty="0"/>
               <a:t>ASK answer: walk the whole list from head every single time — O(n) per insertion, O(n²) total for n nodes. A tail pointer turns this into O(1) per insertion, O(n) total.</a:t>
             </a:r>
-            <a:endParaRPr lang="en-US" dirty="0"/>
           </a:p>
         </p:txBody>
       </p:sp>
@@ -955,7 +731,6 @@
               <a:rPr lang="en-US" dirty="0"/>
               <a:t>Write this exact numbered form on the board — it is the standard exam-answer shape for 'algorithm to create a linked list'. Step 2c/2d is the one place students get confused: the FIRST node needs head set, every node AFTER needs tail-&gt;next set.</a:t>
             </a:r>
-            <a:endParaRPr lang="en-US" dirty="0"/>
           </a:p>
         </p:txBody>
       </p:sp>
@@ -1043,7 +818,6 @@
               <a:rPr lang="en-US" dirty="0"/>
               <a:t>This if/else is the single most important branch in the whole lecture — almost every list-building bug traces back to forgetting this special case for the first node.</a:t>
             </a:r>
-            <a:endParaRPr lang="en-US" dirty="0"/>
           </a:p>
         </p:txBody>
       </p:sp>
@@ -1131,7 +905,6 @@
               <a:rPr lang="en-US" dirty="0"/>
               <a:t>Walk the FIRST iteration slowly on the board: head is NULL, so head=node runs; then tail=node runs unconditionally. By the SECOND iteration, tail already correctly points at node 1.</a:t>
             </a:r>
-            <a:endParaRPr lang="en-US" dirty="0"/>
           </a:p>
         </p:txBody>
       </p:sp>
@@ -1219,7 +992,6 @@
               <a:rPr lang="en-US" dirty="0"/>
               <a:t>This is the compiled program's real behaviour. Point out explicitly: head is set ONCE, on i=1, and never touched again — exactly the discipline slide 10 of Lecture 15 warned about.</a:t>
             </a:r>
-            <a:endParaRPr lang="en-US" dirty="0"/>
           </a:p>
         </p:txBody>
       </p:sp>
@@ -1307,7 +1079,6 @@
               <a:rPr lang="en-US" dirty="0"/>
               <a:t>Name this pattern explicitly as the unit's workhorse. Students should be able to recite: start at head, stop at NULL, step with p = p-&gt;next.</a:t>
             </a:r>
-            <a:endParaRPr lang="en-US" dirty="0"/>
           </a:p>
         </p:txBody>
       </p:sp>
@@ -1395,7 +1166,6 @@
               <a:rPr lang="en-US" dirty="0"/>
               <a:t>This is exactly the search() function from Lecture 15's Practice 7 — today it gets the formal algorithm treatment and a full complexity discussion on the next slide.</a:t>
             </a:r>
-            <a:endParaRPr lang="en-US" dirty="0"/>
           </a:p>
         </p:txBody>
       </p:sp>
@@ -1483,7 +1253,6 @@
               <a:rPr lang="en-US" dirty="0"/>
               <a:t>ASK answer: no — binary search needs O(1) random access to the middle element, but a linked list only offers O(n) access to reach any node beyond the first. This is a genuinely important limitation to name here.</a:t>
             </a:r>
-            <a:endParaRPr lang="en-US" dirty="0"/>
           </a:p>
         </p:txBody>
       </p:sp>
@@ -1556,6 +1325,11 @@
 <file path=ppt/slideMasters/slideMaster1.xml><?xml version="1.0" encoding="utf-8"?>
 <p:sldMaster xmlns:a="http://schemas.openxmlformats.org/drawingml/2006/main" xmlns:r="http://schemas.openxmlformats.org/officeDocument/2006/relationships" xmlns:p="http://schemas.openxmlformats.org/presentationml/2006/main">
   <p:cSld>
+    <p:bg>
+      <p:bgRef idx="1001">
+        <a:schemeClr val="bg1"/>
+      </p:bgRef>
+    </p:bg>
     <p:spTree>
       <p:nvGrpSpPr>
         <p:cNvPr id="1" name=""/>
@@ -1838,6 +1612,7 @@
         <a:solidFill>
           <a:srgbClr val="1E2761"/>
         </a:solidFill>
+        <a:effectLst/>
       </p:bgPr>
     </p:bg>
     <p:spTree>
@@ -1875,11 +1650,11 @@
           <a:bodyPr wrap="square" lIns="0" tIns="0" rIns="0" bIns="0" rtlCol="0" anchor="ctr"/>
           <a:lstStyle/>
           <a:p>
-            <a:pPr indent="0" marL="0">
-              <a:buNone/>
-            </a:pPr>
-            <a:r>
-              <a:rPr lang="en-US" sz="1300" b="1" spc="200" kern="0" dirty="0">
+            <a:pPr marL="0" indent="0">
+              <a:buNone/>
+            </a:pPr>
+            <a:r>
+              <a:rPr lang="en-US" sz="1300" b="1" kern="0" spc="200" dirty="0">
                 <a:solidFill>
                   <a:srgbClr val="D4A017"/>
                 </a:solidFill>
@@ -1914,7 +1689,7 @@
           <a:bodyPr wrap="square" lIns="0" tIns="0" rIns="0" bIns="0" rtlCol="0" anchor="ctr"/>
           <a:lstStyle/>
           <a:p>
-            <a:pPr indent="0" marL="0">
+            <a:pPr marL="0" indent="0">
               <a:buNone/>
             </a:pPr>
             <a:r>
@@ -1953,7 +1728,7 @@
           <a:bodyPr wrap="square" lIns="0" tIns="0" rIns="0" bIns="0" rtlCol="0" anchor="ctr"/>
           <a:lstStyle/>
           <a:p>
-            <a:pPr indent="0" marL="0">
+            <a:pPr marL="0" indent="0">
               <a:buNone/>
             </a:pPr>
             <a:r>
@@ -1992,7 +1767,7 @@
           <a:bodyPr wrap="square" lIns="0" tIns="0" rIns="0" bIns="0" rtlCol="0" anchor="ctr"/>
           <a:lstStyle/>
           <a:p>
-            <a:pPr indent="0" marL="0">
+            <a:pPr marL="0" indent="0">
               <a:buNone/>
             </a:pPr>
             <a:r>
@@ -2034,6 +1809,13 @@
             <a:prstDash val="solid"/>
           </a:ln>
         </p:spPr>
+        <p:txBody>
+          <a:bodyPr/>
+          <a:lstStyle/>
+          <a:p>
+            <a:endParaRPr lang="en-US"/>
+          </a:p>
+        </p:txBody>
       </p:sp>
       <p:sp>
         <p:nvSpPr>
@@ -2056,7 +1838,7 @@
           <a:bodyPr wrap="square" lIns="0" tIns="0" rIns="0" bIns="0" rtlCol="0" anchor="ctr"/>
           <a:lstStyle/>
           <a:p>
-            <a:pPr algn="ctr" indent="0" marL="0">
+            <a:pPr marL="0" indent="0" algn="ctr">
               <a:buNone/>
             </a:pPr>
             <a:r>
@@ -2098,6 +1880,13 @@
             <a:prstDash val="solid"/>
           </a:ln>
         </p:spPr>
+        <p:txBody>
+          <a:bodyPr/>
+          <a:lstStyle/>
+          <a:p>
+            <a:endParaRPr lang="en-US"/>
+          </a:p>
+        </p:txBody>
       </p:sp>
       <p:sp>
         <p:nvSpPr>
@@ -2120,7 +1909,7 @@
           <a:bodyPr wrap="square" lIns="0" tIns="0" rIns="0" bIns="0" rtlCol="0" anchor="ctr"/>
           <a:lstStyle/>
           <a:p>
-            <a:pPr algn="ctr" indent="0" marL="0">
+            <a:pPr marL="0" indent="0" algn="ctr">
               <a:buNone/>
             </a:pPr>
             <a:r>
@@ -2162,6 +1951,13 @@
             <a:prstDash val="solid"/>
           </a:ln>
         </p:spPr>
+        <p:txBody>
+          <a:bodyPr/>
+          <a:lstStyle/>
+          <a:p>
+            <a:endParaRPr lang="en-US"/>
+          </a:p>
+        </p:txBody>
       </p:sp>
       <p:sp>
         <p:nvSpPr>
@@ -2184,7 +1980,7 @@
           <a:bodyPr wrap="square" lIns="0" tIns="0" rIns="0" bIns="0" rtlCol="0" anchor="ctr"/>
           <a:lstStyle/>
           <a:p>
-            <a:pPr algn="ctr" indent="0" marL="0">
+            <a:pPr marL="0" indent="0" algn="ctr">
               <a:buNone/>
             </a:pPr>
             <a:r>
@@ -2226,6 +2022,13 @@
             <a:prstDash val="solid"/>
           </a:ln>
         </p:spPr>
+        <p:txBody>
+          <a:bodyPr/>
+          <a:lstStyle/>
+          <a:p>
+            <a:endParaRPr lang="en-US"/>
+          </a:p>
+        </p:txBody>
       </p:sp>
       <p:sp>
         <p:nvSpPr>
@@ -2248,7 +2051,7 @@
           <a:bodyPr wrap="square" lIns="0" tIns="0" rIns="0" bIns="0" rtlCol="0" anchor="ctr"/>
           <a:lstStyle/>
           <a:p>
-            <a:pPr algn="ctr" indent="0" marL="0">
+            <a:pPr marL="0" indent="0" algn="ctr">
               <a:buNone/>
             </a:pPr>
             <a:r>
@@ -2290,6 +2093,13 @@
             <a:prstDash val="solid"/>
           </a:ln>
         </p:spPr>
+        <p:txBody>
+          <a:bodyPr/>
+          <a:lstStyle/>
+          <a:p>
+            <a:endParaRPr lang="en-US"/>
+          </a:p>
+        </p:txBody>
       </p:sp>
       <p:sp>
         <p:nvSpPr>
@@ -2312,7 +2122,7 @@
           <a:bodyPr wrap="square" lIns="0" tIns="0" rIns="0" bIns="0" rtlCol="0" anchor="ctr"/>
           <a:lstStyle/>
           <a:p>
-            <a:pPr algn="ctr" indent="0" marL="0">
+            <a:pPr marL="0" indent="0" algn="ctr">
               <a:buNone/>
             </a:pPr>
             <a:r>
@@ -2351,7 +2161,7 @@
           <a:bodyPr wrap="square" lIns="0" tIns="0" rIns="0" bIns="0" rtlCol="0" anchor="ctr"/>
           <a:lstStyle/>
           <a:p>
-            <a:pPr indent="0" marL="0">
+            <a:pPr marL="0" indent="0">
               <a:buNone/>
             </a:pPr>
             <a:r>
@@ -2415,11 +2225,11 @@
           <a:bodyPr wrap="square" lIns="0" tIns="0" rIns="0" bIns="0" rtlCol="0" anchor="ctr"/>
           <a:lstStyle/>
           <a:p>
-            <a:pPr indent="0" marL="0">
-              <a:buNone/>
-            </a:pPr>
-            <a:r>
-              <a:rPr lang="en-US" sz="1100" b="1" spc="200" kern="0" dirty="0">
+            <a:pPr marL="0" indent="0">
+              <a:buNone/>
+            </a:pPr>
+            <a:r>
+              <a:rPr lang="en-US" sz="1100" b="1" kern="0" spc="200" dirty="0">
                 <a:solidFill>
                   <a:srgbClr val="028090"/>
                 </a:solidFill>
@@ -2454,7 +2264,7 @@
           <a:bodyPr wrap="square" lIns="0" tIns="0" rIns="0" bIns="0" rtlCol="0" anchor="ctr"/>
           <a:lstStyle/>
           <a:p>
-            <a:pPr indent="0" marL="0">
+            <a:pPr marL="0" indent="0">
               <a:buNone/>
             </a:pPr>
             <a:r>
@@ -2493,7 +2303,7 @@
           <a:bodyPr wrap="square" lIns="0" tIns="0" rIns="0" bIns="0" rtlCol="0" anchor="ctr"/>
           <a:lstStyle/>
           <a:p>
-            <a:pPr indent="0" marL="0">
+            <a:pPr marL="0" indent="0">
               <a:buNone/>
             </a:pPr>
             <a:r>
@@ -2532,7 +2342,7 @@
           <a:bodyPr wrap="square" lIns="0" tIns="0" rIns="0" bIns="0" rtlCol="0" anchor="ctr"/>
           <a:lstStyle/>
           <a:p>
-            <a:pPr algn="r" indent="0" marL="0">
+            <a:pPr marL="0" indent="0" algn="r">
               <a:buNone/>
             </a:pPr>
             <a:r>
@@ -2576,6 +2386,13 @@
             <a:prstDash val="solid"/>
           </a:ln>
         </p:spPr>
+        <p:txBody>
+          <a:bodyPr/>
+          <a:lstStyle/>
+          <a:p>
+            <a:endParaRPr lang="en-US"/>
+          </a:p>
+        </p:txBody>
       </p:sp>
       <p:sp>
         <p:nvSpPr>
@@ -2598,7 +2415,7 @@
           <a:bodyPr wrap="square" lIns="0" tIns="0" rIns="0" bIns="0" rtlCol="0" anchor="ctr"/>
           <a:lstStyle/>
           <a:p>
-            <a:pPr indent="0" marL="0">
+            <a:pPr marL="0" indent="0">
               <a:buNone/>
             </a:pPr>
             <a:r>
@@ -2640,6 +2457,13 @@
             <a:prstDash val="solid"/>
           </a:ln>
         </p:spPr>
+        <p:txBody>
+          <a:bodyPr/>
+          <a:lstStyle/>
+          <a:p>
+            <a:endParaRPr lang="en-US"/>
+          </a:p>
+        </p:txBody>
       </p:sp>
       <p:sp>
         <p:nvSpPr>
@@ -2662,7 +2486,7 @@
           <a:bodyPr wrap="square" lIns="0" tIns="0" rIns="0" bIns="0" rtlCol="0" anchor="ctr"/>
           <a:lstStyle/>
           <a:p>
-            <a:pPr algn="ctr" indent="0" marL="0">
+            <a:pPr marL="0" indent="0" algn="ctr">
               <a:buNone/>
             </a:pPr>
             <a:r>
@@ -2704,6 +2528,13 @@
             <a:prstDash val="solid"/>
           </a:ln>
         </p:spPr>
+        <p:txBody>
+          <a:bodyPr/>
+          <a:lstStyle/>
+          <a:p>
+            <a:endParaRPr lang="en-US"/>
+          </a:p>
+        </p:txBody>
       </p:sp>
       <p:sp>
         <p:nvSpPr>
@@ -2726,7 +2557,7 @@
           <a:bodyPr wrap="square" lIns="0" tIns="0" rIns="0" bIns="0" rtlCol="0" anchor="ctr"/>
           <a:lstStyle/>
           <a:p>
-            <a:pPr algn="ctr" indent="0" marL="0">
+            <a:pPr marL="0" indent="0" algn="ctr">
               <a:buNone/>
             </a:pPr>
             <a:r>
@@ -2768,6 +2599,13 @@
             <a:prstDash val="solid"/>
           </a:ln>
         </p:spPr>
+        <p:txBody>
+          <a:bodyPr/>
+          <a:lstStyle/>
+          <a:p>
+            <a:endParaRPr lang="en-US"/>
+          </a:p>
+        </p:txBody>
       </p:sp>
       <p:sp>
         <p:nvSpPr>
@@ -2790,7 +2628,7 @@
           <a:bodyPr wrap="square" lIns="0" tIns="0" rIns="0" bIns="0" rtlCol="0" anchor="ctr"/>
           <a:lstStyle/>
           <a:p>
-            <a:pPr algn="ctr" indent="0" marL="0">
+            <a:pPr marL="0" indent="0" algn="ctr">
               <a:buNone/>
             </a:pPr>
             <a:r>
@@ -2832,6 +2670,13 @@
             <a:prstDash val="solid"/>
           </a:ln>
         </p:spPr>
+        <p:txBody>
+          <a:bodyPr/>
+          <a:lstStyle/>
+          <a:p>
+            <a:endParaRPr lang="en-US"/>
+          </a:p>
+        </p:txBody>
       </p:sp>
       <p:sp>
         <p:nvSpPr>
@@ -2854,7 +2699,7 @@
           <a:bodyPr wrap="square" lIns="0" tIns="0" rIns="0" bIns="0" rtlCol="0" anchor="ctr"/>
           <a:lstStyle/>
           <a:p>
-            <a:pPr algn="ctr" indent="0" marL="0">
+            <a:pPr marL="0" indent="0" algn="ctr">
               <a:buNone/>
             </a:pPr>
             <a:r>
@@ -2896,6 +2741,13 @@
             <a:prstDash val="solid"/>
           </a:ln>
         </p:spPr>
+        <p:txBody>
+          <a:bodyPr/>
+          <a:lstStyle/>
+          <a:p>
+            <a:endParaRPr lang="en-US"/>
+          </a:p>
+        </p:txBody>
       </p:sp>
       <p:sp>
         <p:nvSpPr>
@@ -2918,7 +2770,7 @@
           <a:bodyPr wrap="square" lIns="0" tIns="0" rIns="0" bIns="0" rtlCol="0" anchor="ctr"/>
           <a:lstStyle/>
           <a:p>
-            <a:pPr algn="ctr" indent="0" marL="0">
+            <a:pPr marL="0" indent="0" algn="ctr">
               <a:buNone/>
             </a:pPr>
             <a:r>
@@ -2957,7 +2809,7 @@
           <a:bodyPr wrap="square" lIns="0" tIns="0" rIns="0" bIns="0" rtlCol="0" anchor="ctr"/>
           <a:lstStyle/>
           <a:p>
-            <a:pPr algn="ctr" indent="0" marL="0">
+            <a:pPr marL="0" indent="0" algn="ctr">
               <a:buNone/>
             </a:pPr>
             <a:r>
@@ -2996,7 +2848,7 @@
           <a:bodyPr wrap="square" lIns="0" tIns="0" rIns="0" bIns="0" rtlCol="0" anchor="ctr"/>
           <a:lstStyle/>
           <a:p>
-            <a:pPr algn="ctr" indent="0" marL="0">
+            <a:pPr marL="0" indent="0" algn="ctr">
               <a:buNone/>
             </a:pPr>
             <a:r>
@@ -3035,7 +2887,7 @@
           <a:bodyPr wrap="square" lIns="0" tIns="0" rIns="0" bIns="0" rtlCol="0" anchor="ctr"/>
           <a:lstStyle/>
           <a:p>
-            <a:pPr algn="ctr" indent="0" marL="0">
+            <a:pPr marL="0" indent="0" algn="ctr">
               <a:buNone/>
             </a:pPr>
             <a:r>
@@ -3074,7 +2926,7 @@
           <a:bodyPr wrap="square" lIns="0" tIns="0" rIns="0" bIns="0" rtlCol="0" anchor="ctr"/>
           <a:lstStyle/>
           <a:p>
-            <a:pPr algn="ctr" indent="0" marL="0">
+            <a:pPr marL="0" indent="0" algn="ctr">
               <a:buNone/>
             </a:pPr>
             <a:r>
@@ -3113,7 +2965,7 @@
           <a:bodyPr wrap="square" lIns="0" tIns="0" rIns="0" bIns="0" rtlCol="0" anchor="ctr"/>
           <a:lstStyle/>
           <a:p>
-            <a:pPr algn="ctr" indent="0" marL="0">
+            <a:pPr marL="0" indent="0" algn="ctr">
               <a:buNone/>
             </a:pPr>
             <a:r>
@@ -3133,7 +2985,7 @@
       </p:sp>
       <p:graphicFrame>
         <p:nvGraphicFramePr>
-          <p:cNvPr id="11" name="Table 0"/>
+          <p:cNvPr id="23" name="Table 0"/>
           <p:cNvGraphicFramePr>
             <a:graphicFrameLocks noGrp="1"/>
           </p:cNvGraphicFramePr>
@@ -3147,15 +2999,27 @@
         </p:nvGraphicFramePr>
         <p:xfrm>
           <a:off x="457200" y="2971800"/>
-          <a:ext cx="8229600" cy="914400"/>
+          <a:ext cx="8229600" cy="1536192"/>
         </p:xfrm>
         <a:graphic>
           <a:graphicData uri="http://schemas.openxmlformats.org/drawingml/2006/table">
             <a:tbl>
               <a:tblPr/>
               <a:tblGrid>
-                <a:gridCol w="2377440"/>
-                <a:gridCol w="5852160"/>
+                <a:gridCol w="2377440">
+                  <a:extLst>
+                    <a:ext uri="{9D8B030D-6E8A-4147-A177-3AD203B41FA5}">
+                      <a16:colId xmlns:a16="http://schemas.microsoft.com/office/drawing/2014/main" val="20000"/>
+                    </a:ext>
+                  </a:extLst>
+                </a:gridCol>
+                <a:gridCol w="5852160">
+                  <a:extLst>
+                    <a:ext uri="{9D8B030D-6E8A-4147-A177-3AD203B41FA5}">
+                      <a16:colId xmlns:a16="http://schemas.microsoft.com/office/drawing/2014/main" val="20001"/>
+                    </a:ext>
+                  </a:extLst>
+                </a:gridCol>
               </a:tblGrid>
               <a:tr h="384048">
                 <a:tc>
@@ -3163,7 +3027,7 @@
                     <a:bodyPr/>
                     <a:lstStyle/>
                     <a:p>
-                      <a:pPr algn="l" indent="0" marL="0">
+                      <a:pPr marL="0" indent="0" algn="l">
                         <a:buNone/>
                       </a:pPr>
                       <a:r>
@@ -3184,7 +3048,7 @@
                       </a:endParaRPr>
                     </a:p>
                   </a:txBody>
-                  <a:tcPr marL="91440" marR="91440" marT="45720" marB="45720" anchor="ctr">
+                  <a:tcPr anchor="ctr">
                     <a:lnL w="9525" cap="flat" cmpd="sng" algn="ctr">
                       <a:solidFill>
                         <a:srgbClr val="D9D9D9"/>
@@ -3231,7 +3095,7 @@
                     <a:bodyPr/>
                     <a:lstStyle/>
                     <a:p>
-                      <a:pPr algn="l" indent="0" marL="0">
+                      <a:pPr marL="0" indent="0" algn="l">
                         <a:buNone/>
                       </a:pPr>
                       <a:r>
@@ -3252,7 +3116,7 @@
                       </a:endParaRPr>
                     </a:p>
                   </a:txBody>
-                  <a:tcPr marL="91440" marR="91440" marT="45720" marB="45720" anchor="ctr">
+                  <a:tcPr anchor="ctr">
                     <a:lnL w="9525" cap="flat" cmpd="sng" algn="ctr">
                       <a:solidFill>
                         <a:srgbClr val="D9D9D9"/>
@@ -3294,6 +3158,11 @@
                     </a:solidFill>
                   </a:tcPr>
                 </a:tc>
+                <a:extLst>
+                  <a:ext uri="{0D108BD9-81ED-4DB2-BD59-A6C34878D82A}">
+                    <a16:rowId xmlns:a16="http://schemas.microsoft.com/office/drawing/2014/main" val="10000"/>
+                  </a:ext>
+                </a:extLst>
               </a:tr>
               <a:tr h="384048">
                 <a:tc>
@@ -3301,7 +3170,7 @@
                     <a:bodyPr/>
                     <a:lstStyle/>
                     <a:p>
-                      <a:pPr algn="l" indent="0" marL="0">
+                      <a:pPr marL="0" indent="0" algn="l">
                         <a:buNone/>
                       </a:pPr>
                       <a:r>
@@ -3322,7 +3191,7 @@
                       </a:endParaRPr>
                     </a:p>
                   </a:txBody>
-                  <a:tcPr marL="91440" marR="91440" marT="45720" marB="45720" anchor="ctr">
+                  <a:tcPr anchor="ctr">
                     <a:lnL w="9525" cap="flat" cmpd="sng" algn="ctr">
                       <a:solidFill>
                         <a:srgbClr val="D9D9D9"/>
@@ -3366,7 +3235,7 @@
                     <a:bodyPr/>
                     <a:lstStyle/>
                     <a:p>
-                      <a:pPr algn="l" indent="0" marL="0">
+                      <a:pPr marL="0" indent="0" algn="l">
                         <a:buNone/>
                       </a:pPr>
                       <a:r>
@@ -3387,7 +3256,7 @@
                       </a:endParaRPr>
                     </a:p>
                   </a:txBody>
-                  <a:tcPr marL="91440" marR="91440" marT="45720" marB="45720" anchor="ctr">
+                  <a:tcPr anchor="ctr">
                     <a:lnL w="9525" cap="flat" cmpd="sng" algn="ctr">
                       <a:solidFill>
                         <a:srgbClr val="D9D9D9"/>
@@ -3426,6 +3295,11 @@
                     </a:lnB>
                   </a:tcPr>
                 </a:tc>
+                <a:extLst>
+                  <a:ext uri="{0D108BD9-81ED-4DB2-BD59-A6C34878D82A}">
+                    <a16:rowId xmlns:a16="http://schemas.microsoft.com/office/drawing/2014/main" val="10001"/>
+                  </a:ext>
+                </a:extLst>
               </a:tr>
               <a:tr h="384048">
                 <a:tc>
@@ -3433,7 +3307,7 @@
                     <a:bodyPr/>
                     <a:lstStyle/>
                     <a:p>
-                      <a:pPr algn="l" indent="0" marL="0">
+                      <a:pPr marL="0" indent="0" algn="l">
                         <a:buNone/>
                       </a:pPr>
                       <a:r>
@@ -3454,7 +3328,7 @@
                       </a:endParaRPr>
                     </a:p>
                   </a:txBody>
-                  <a:tcPr marL="91440" marR="91440" marT="45720" marB="45720" anchor="ctr">
+                  <a:tcPr anchor="ctr">
                     <a:lnL w="9525" cap="flat" cmpd="sng" algn="ctr">
                       <a:solidFill>
                         <a:srgbClr val="D9D9D9"/>
@@ -3498,7 +3372,7 @@
                     <a:bodyPr/>
                     <a:lstStyle/>
                     <a:p>
-                      <a:pPr algn="l" indent="0" marL="0">
+                      <a:pPr marL="0" indent="0" algn="l">
                         <a:buNone/>
                       </a:pPr>
                       <a:r>
@@ -3519,7 +3393,7 @@
                       </a:endParaRPr>
                     </a:p>
                   </a:txBody>
-                  <a:tcPr marL="91440" marR="91440" marT="45720" marB="45720" anchor="ctr">
+                  <a:tcPr anchor="ctr">
                     <a:lnL w="9525" cap="flat" cmpd="sng" algn="ctr">
                       <a:solidFill>
                         <a:srgbClr val="D9D9D9"/>
@@ -3558,6 +3432,11 @@
                     </a:lnB>
                   </a:tcPr>
                 </a:tc>
+                <a:extLst>
+                  <a:ext uri="{0D108BD9-81ED-4DB2-BD59-A6C34878D82A}">
+                    <a16:rowId xmlns:a16="http://schemas.microsoft.com/office/drawing/2014/main" val="10002"/>
+                  </a:ext>
+                </a:extLst>
               </a:tr>
               <a:tr h="384048">
                 <a:tc>
@@ -3565,7 +3444,7 @@
                     <a:bodyPr/>
                     <a:lstStyle/>
                     <a:p>
-                      <a:pPr algn="l" indent="0" marL="0">
+                      <a:pPr marL="0" indent="0" algn="l">
                         <a:buNone/>
                       </a:pPr>
                       <a:r>
@@ -3586,7 +3465,7 @@
                       </a:endParaRPr>
                     </a:p>
                   </a:txBody>
-                  <a:tcPr marL="91440" marR="91440" marT="45720" marB="45720" anchor="ctr">
+                  <a:tcPr anchor="ctr">
                     <a:lnL w="9525" cap="flat" cmpd="sng" algn="ctr">
                       <a:solidFill>
                         <a:srgbClr val="D9D9D9"/>
@@ -3630,7 +3509,7 @@
                     <a:bodyPr/>
                     <a:lstStyle/>
                     <a:p>
-                      <a:pPr algn="l" indent="0" marL="0">
+                      <a:pPr marL="0" indent="0" algn="l">
                         <a:buNone/>
                       </a:pPr>
                       <a:r>
@@ -3651,7 +3530,7 @@
                       </a:endParaRPr>
                     </a:p>
                   </a:txBody>
-                  <a:tcPr marL="91440" marR="91440" marT="45720" marB="45720" anchor="ctr">
+                  <a:tcPr anchor="ctr">
                     <a:lnL w="9525" cap="flat" cmpd="sng" algn="ctr">
                       <a:solidFill>
                         <a:srgbClr val="D9D9D9"/>
@@ -3690,6 +3569,11 @@
                     </a:lnB>
                   </a:tcPr>
                 </a:tc>
+                <a:extLst>
+                  <a:ext uri="{0D108BD9-81ED-4DB2-BD59-A6C34878D82A}">
+                    <a16:rowId xmlns:a16="http://schemas.microsoft.com/office/drawing/2014/main" val="10003"/>
+                  </a:ext>
+                </a:extLst>
               </a:tr>
             </a:tbl>
           </a:graphicData>
@@ -3716,7 +3600,7 @@
           <a:bodyPr wrap="square" lIns="0" tIns="0" rIns="0" bIns="0" rtlCol="0" anchor="ctr"/>
           <a:lstStyle/>
           <a:p>
-            <a:pPr indent="0" marL="0">
+            <a:pPr marL="0" indent="0">
               <a:buNone/>
             </a:pPr>
             <a:r>
@@ -3780,11 +3664,11 @@
           <a:bodyPr wrap="square" lIns="0" tIns="0" rIns="0" bIns="0" rtlCol="0" anchor="ctr"/>
           <a:lstStyle/>
           <a:p>
-            <a:pPr indent="0" marL="0">
-              <a:buNone/>
-            </a:pPr>
-            <a:r>
-              <a:rPr lang="en-US" sz="1100" b="1" spc="200" kern="0" dirty="0">
+            <a:pPr marL="0" indent="0">
+              <a:buNone/>
+            </a:pPr>
+            <a:r>
+              <a:rPr lang="en-US" sz="1100" b="1" kern="0" spc="200" dirty="0">
                 <a:solidFill>
                   <a:srgbClr val="028090"/>
                 </a:solidFill>
@@ -3819,7 +3703,7 @@
           <a:bodyPr wrap="square" lIns="0" tIns="0" rIns="0" bIns="0" rtlCol="0" anchor="ctr"/>
           <a:lstStyle/>
           <a:p>
-            <a:pPr indent="0" marL="0">
+            <a:pPr marL="0" indent="0">
               <a:buNone/>
             </a:pPr>
             <a:r>
@@ -3858,7 +3742,7 @@
           <a:bodyPr wrap="square" lIns="0" tIns="0" rIns="0" bIns="0" rtlCol="0" anchor="ctr"/>
           <a:lstStyle/>
           <a:p>
-            <a:pPr indent="0" marL="0">
+            <a:pPr marL="0" indent="0">
               <a:buNone/>
             </a:pPr>
             <a:r>
@@ -3897,7 +3781,7 @@
           <a:bodyPr wrap="square" lIns="0" tIns="0" rIns="0" bIns="0" rtlCol="0" anchor="ctr"/>
           <a:lstStyle/>
           <a:p>
-            <a:pPr algn="r" indent="0" marL="0">
+            <a:pPr marL="0" indent="0" algn="r">
               <a:buNone/>
             </a:pPr>
             <a:r>
@@ -3931,16 +3815,34 @@
         </p:nvGraphicFramePr>
         <p:xfrm>
           <a:off x="457200" y="1280160"/>
-          <a:ext cx="8229600" cy="914400"/>
+          <a:ext cx="8229600" cy="2651760"/>
         </p:xfrm>
         <a:graphic>
           <a:graphicData uri="http://schemas.openxmlformats.org/drawingml/2006/table">
             <a:tbl>
               <a:tblPr/>
               <a:tblGrid>
-                <a:gridCol w="2103120"/>
-                <a:gridCol w="3063240"/>
-                <a:gridCol w="3063240"/>
+                <a:gridCol w="2103120">
+                  <a:extLst>
+                    <a:ext uri="{9D8B030D-6E8A-4147-A177-3AD203B41FA5}">
+                      <a16:colId xmlns:a16="http://schemas.microsoft.com/office/drawing/2014/main" val="20000"/>
+                    </a:ext>
+                  </a:extLst>
+                </a:gridCol>
+                <a:gridCol w="3063240">
+                  <a:extLst>
+                    <a:ext uri="{9D8B030D-6E8A-4147-A177-3AD203B41FA5}">
+                      <a16:colId xmlns:a16="http://schemas.microsoft.com/office/drawing/2014/main" val="20001"/>
+                    </a:ext>
+                  </a:extLst>
+                </a:gridCol>
+                <a:gridCol w="3063240">
+                  <a:extLst>
+                    <a:ext uri="{9D8B030D-6E8A-4147-A177-3AD203B41FA5}">
+                      <a16:colId xmlns:a16="http://schemas.microsoft.com/office/drawing/2014/main" val="20002"/>
+                    </a:ext>
+                  </a:extLst>
+                </a:gridCol>
               </a:tblGrid>
               <a:tr h="530352">
                 <a:tc>
@@ -3948,7 +3850,7 @@
                     <a:bodyPr/>
                     <a:lstStyle/>
                     <a:p>
-                      <a:pPr algn="l" indent="0" marL="0">
+                      <a:pPr marL="0" indent="0" algn="l">
                         <a:buNone/>
                       </a:pPr>
                       <a:r>
@@ -3969,7 +3871,7 @@
                       </a:endParaRPr>
                     </a:p>
                   </a:txBody>
-                  <a:tcPr marL="91440" marR="91440" marT="45720" marB="45720" anchor="ctr">
+                  <a:tcPr anchor="ctr">
                     <a:lnL w="9525" cap="flat" cmpd="sng" algn="ctr">
                       <a:solidFill>
                         <a:srgbClr val="D9D9D9"/>
@@ -4016,7 +3918,7 @@
                     <a:bodyPr/>
                     <a:lstStyle/>
                     <a:p>
-                      <a:pPr algn="ctr" indent="0" marL="0">
+                      <a:pPr marL="0" indent="0" algn="ctr">
                         <a:buNone/>
                       </a:pPr>
                       <a:r>
@@ -4037,7 +3939,7 @@
                       </a:endParaRPr>
                     </a:p>
                   </a:txBody>
-                  <a:tcPr marL="91440" marR="91440" marT="45720" marB="45720" anchor="ctr">
+                  <a:tcPr anchor="ctr">
                     <a:lnL w="9525" cap="flat" cmpd="sng" algn="ctr">
                       <a:solidFill>
                         <a:srgbClr val="D9D9D9"/>
@@ -4084,7 +3986,7 @@
                     <a:bodyPr/>
                     <a:lstStyle/>
                     <a:p>
-                      <a:pPr algn="ctr" indent="0" marL="0">
+                      <a:pPr marL="0" indent="0" algn="ctr">
                         <a:buNone/>
                       </a:pPr>
                       <a:r>
@@ -4105,7 +4007,7 @@
                       </a:endParaRPr>
                     </a:p>
                   </a:txBody>
-                  <a:tcPr marL="91440" marR="91440" marT="45720" marB="45720" anchor="ctr">
+                  <a:tcPr anchor="ctr">
                     <a:lnL w="9525" cap="flat" cmpd="sng" algn="ctr">
                       <a:solidFill>
                         <a:srgbClr val="D9D9D9"/>
@@ -4147,6 +4049,11 @@
                     </a:solidFill>
                   </a:tcPr>
                 </a:tc>
+                <a:extLst>
+                  <a:ext uri="{0D108BD9-81ED-4DB2-BD59-A6C34878D82A}">
+                    <a16:rowId xmlns:a16="http://schemas.microsoft.com/office/drawing/2014/main" val="10000"/>
+                  </a:ext>
+                </a:extLst>
               </a:tr>
               <a:tr h="530352">
                 <a:tc>
@@ -4154,7 +4061,7 @@
                     <a:bodyPr/>
                     <a:lstStyle/>
                     <a:p>
-                      <a:pPr algn="l" indent="0" marL="0">
+                      <a:pPr marL="0" indent="0" algn="l">
                         <a:buNone/>
                       </a:pPr>
                       <a:r>
@@ -4175,7 +4082,7 @@
                       </a:endParaRPr>
                     </a:p>
                   </a:txBody>
-                  <a:tcPr marL="91440" marR="91440" marT="45720" marB="45720" anchor="ctr">
+                  <a:tcPr anchor="ctr">
                     <a:lnL w="9525" cap="flat" cmpd="sng" algn="ctr">
                       <a:solidFill>
                         <a:srgbClr val="D9D9D9"/>
@@ -4219,7 +4126,7 @@
                     <a:bodyPr/>
                     <a:lstStyle/>
                     <a:p>
-                      <a:pPr algn="ctr" indent="0" marL="0">
+                      <a:pPr marL="0" indent="0" algn="ctr">
                         <a:buNone/>
                       </a:pPr>
                       <a:r>
@@ -4240,7 +4147,7 @@
                       </a:endParaRPr>
                     </a:p>
                   </a:txBody>
-                  <a:tcPr marL="91440" marR="91440" marT="45720" marB="45720" anchor="ctr">
+                  <a:tcPr anchor="ctr">
                     <a:lnL w="9525" cap="flat" cmpd="sng" algn="ctr">
                       <a:solidFill>
                         <a:srgbClr val="D9D9D9"/>
@@ -4284,7 +4191,7 @@
                     <a:bodyPr/>
                     <a:lstStyle/>
                     <a:p>
-                      <a:pPr algn="ctr" indent="0" marL="0">
+                      <a:pPr marL="0" indent="0" algn="ctr">
                         <a:buNone/>
                       </a:pPr>
                       <a:r>
@@ -4305,7 +4212,7 @@
                       </a:endParaRPr>
                     </a:p>
                   </a:txBody>
-                  <a:tcPr marL="91440" marR="91440" marT="45720" marB="45720" anchor="ctr">
+                  <a:tcPr anchor="ctr">
                     <a:lnL w="9525" cap="flat" cmpd="sng" algn="ctr">
                       <a:solidFill>
                         <a:srgbClr val="D9D9D9"/>
@@ -4344,6 +4251,11 @@
                     </a:lnB>
                   </a:tcPr>
                 </a:tc>
+                <a:extLst>
+                  <a:ext uri="{0D108BD9-81ED-4DB2-BD59-A6C34878D82A}">
+                    <a16:rowId xmlns:a16="http://schemas.microsoft.com/office/drawing/2014/main" val="10001"/>
+                  </a:ext>
+                </a:extLst>
               </a:tr>
               <a:tr h="530352">
                 <a:tc>
@@ -4351,7 +4263,7 @@
                     <a:bodyPr/>
                     <a:lstStyle/>
                     <a:p>
-                      <a:pPr algn="l" indent="0" marL="0">
+                      <a:pPr marL="0" indent="0" algn="l">
                         <a:buNone/>
                       </a:pPr>
                       <a:r>
@@ -4372,7 +4284,7 @@
                       </a:endParaRPr>
                     </a:p>
                   </a:txBody>
-                  <a:tcPr marL="91440" marR="91440" marT="45720" marB="45720" anchor="ctr">
+                  <a:tcPr anchor="ctr">
                     <a:lnL w="9525" cap="flat" cmpd="sng" algn="ctr">
                       <a:solidFill>
                         <a:srgbClr val="D9D9D9"/>
@@ -4416,7 +4328,7 @@
                     <a:bodyPr/>
                     <a:lstStyle/>
                     <a:p>
-                      <a:pPr algn="ctr" indent="0" marL="0">
+                      <a:pPr marL="0" indent="0" algn="ctr">
                         <a:buNone/>
                       </a:pPr>
                       <a:r>
@@ -4437,7 +4349,7 @@
                       </a:endParaRPr>
                     </a:p>
                   </a:txBody>
-                  <a:tcPr marL="91440" marR="91440" marT="45720" marB="45720" anchor="ctr">
+                  <a:tcPr anchor="ctr">
                     <a:lnL w="9525" cap="flat" cmpd="sng" algn="ctr">
                       <a:solidFill>
                         <a:srgbClr val="D9D9D9"/>
@@ -4481,7 +4393,7 @@
                     <a:bodyPr/>
                     <a:lstStyle/>
                     <a:p>
-                      <a:pPr algn="ctr" indent="0" marL="0">
+                      <a:pPr marL="0" indent="0" algn="ctr">
                         <a:buNone/>
                       </a:pPr>
                       <a:r>
@@ -4502,7 +4414,7 @@
                       </a:endParaRPr>
                     </a:p>
                   </a:txBody>
-                  <a:tcPr marL="91440" marR="91440" marT="45720" marB="45720" anchor="ctr">
+                  <a:tcPr anchor="ctr">
                     <a:lnL w="9525" cap="flat" cmpd="sng" algn="ctr">
                       <a:solidFill>
                         <a:srgbClr val="D9D9D9"/>
@@ -4541,6 +4453,11 @@
                     </a:lnB>
                   </a:tcPr>
                 </a:tc>
+                <a:extLst>
+                  <a:ext uri="{0D108BD9-81ED-4DB2-BD59-A6C34878D82A}">
+                    <a16:rowId xmlns:a16="http://schemas.microsoft.com/office/drawing/2014/main" val="10002"/>
+                  </a:ext>
+                </a:extLst>
               </a:tr>
               <a:tr h="530352">
                 <a:tc>
@@ -4548,7 +4465,7 @@
                     <a:bodyPr/>
                     <a:lstStyle/>
                     <a:p>
-                      <a:pPr algn="l" indent="0" marL="0">
+                      <a:pPr marL="0" indent="0" algn="l">
                         <a:buNone/>
                       </a:pPr>
                       <a:r>
@@ -4569,7 +4486,7 @@
                       </a:endParaRPr>
                     </a:p>
                   </a:txBody>
-                  <a:tcPr marL="91440" marR="91440" marT="45720" marB="45720" anchor="ctr">
+                  <a:tcPr anchor="ctr">
                     <a:lnL w="9525" cap="flat" cmpd="sng" algn="ctr">
                       <a:solidFill>
                         <a:srgbClr val="D9D9D9"/>
@@ -4613,7 +4530,7 @@
                     <a:bodyPr/>
                     <a:lstStyle/>
                     <a:p>
-                      <a:pPr algn="ctr" indent="0" marL="0">
+                      <a:pPr marL="0" indent="0" algn="ctr">
                         <a:buNone/>
                       </a:pPr>
                       <a:r>
@@ -4634,7 +4551,7 @@
                       </a:endParaRPr>
                     </a:p>
                   </a:txBody>
-                  <a:tcPr marL="91440" marR="91440" marT="45720" marB="45720" anchor="ctr">
+                  <a:tcPr anchor="ctr">
                     <a:lnL w="9525" cap="flat" cmpd="sng" algn="ctr">
                       <a:solidFill>
                         <a:srgbClr val="D9D9D9"/>
@@ -4678,7 +4595,7 @@
                     <a:bodyPr/>
                     <a:lstStyle/>
                     <a:p>
-                      <a:pPr algn="ctr" indent="0" marL="0">
+                      <a:pPr marL="0" indent="0" algn="ctr">
                         <a:buNone/>
                       </a:pPr>
                       <a:r>
@@ -4699,7 +4616,7 @@
                       </a:endParaRPr>
                     </a:p>
                   </a:txBody>
-                  <a:tcPr marL="91440" marR="91440" marT="45720" marB="45720" anchor="ctr">
+                  <a:tcPr anchor="ctr">
                     <a:lnL w="9525" cap="flat" cmpd="sng" algn="ctr">
                       <a:solidFill>
                         <a:srgbClr val="D9D9D9"/>
@@ -4738,6 +4655,11 @@
                     </a:lnB>
                   </a:tcPr>
                 </a:tc>
+                <a:extLst>
+                  <a:ext uri="{0D108BD9-81ED-4DB2-BD59-A6C34878D82A}">
+                    <a16:rowId xmlns:a16="http://schemas.microsoft.com/office/drawing/2014/main" val="10003"/>
+                  </a:ext>
+                </a:extLst>
               </a:tr>
               <a:tr h="530352">
                 <a:tc>
@@ -4745,7 +4667,7 @@
                     <a:bodyPr/>
                     <a:lstStyle/>
                     <a:p>
-                      <a:pPr algn="l" indent="0" marL="0">
+                      <a:pPr marL="0" indent="0" algn="l">
                         <a:buNone/>
                       </a:pPr>
                       <a:r>
@@ -4766,7 +4688,7 @@
                       </a:endParaRPr>
                     </a:p>
                   </a:txBody>
-                  <a:tcPr marL="91440" marR="91440" marT="45720" marB="45720" anchor="ctr">
+                  <a:tcPr anchor="ctr">
                     <a:lnL w="9525" cap="flat" cmpd="sng" algn="ctr">
                       <a:solidFill>
                         <a:srgbClr val="D9D9D9"/>
@@ -4810,7 +4732,7 @@
                     <a:bodyPr/>
                     <a:lstStyle/>
                     <a:p>
-                      <a:pPr algn="ctr" indent="0" marL="0">
+                      <a:pPr marL="0" indent="0" algn="ctr">
                         <a:buNone/>
                       </a:pPr>
                       <a:r>
@@ -4831,7 +4753,7 @@
                       </a:endParaRPr>
                     </a:p>
                   </a:txBody>
-                  <a:tcPr marL="91440" marR="91440" marT="45720" marB="45720" anchor="ctr">
+                  <a:tcPr anchor="ctr">
                     <a:lnL w="9525" cap="flat" cmpd="sng" algn="ctr">
                       <a:solidFill>
                         <a:srgbClr val="D9D9D9"/>
@@ -4875,7 +4797,7 @@
                     <a:bodyPr/>
                     <a:lstStyle/>
                     <a:p>
-                      <a:pPr algn="ctr" indent="0" marL="0">
+                      <a:pPr marL="0" indent="0" algn="ctr">
                         <a:buNone/>
                       </a:pPr>
                       <a:r>
@@ -4896,7 +4818,7 @@
                       </a:endParaRPr>
                     </a:p>
                   </a:txBody>
-                  <a:tcPr marL="91440" marR="91440" marT="45720" marB="45720" anchor="ctr">
+                  <a:tcPr anchor="ctr">
                     <a:lnL w="9525" cap="flat" cmpd="sng" algn="ctr">
                       <a:solidFill>
                         <a:srgbClr val="D9D9D9"/>
@@ -4935,6 +4857,11 @@
                     </a:lnB>
                   </a:tcPr>
                 </a:tc>
+                <a:extLst>
+                  <a:ext uri="{0D108BD9-81ED-4DB2-BD59-A6C34878D82A}">
+                    <a16:rowId xmlns:a16="http://schemas.microsoft.com/office/drawing/2014/main" val="10004"/>
+                  </a:ext>
+                </a:extLst>
               </a:tr>
             </a:tbl>
           </a:graphicData>
@@ -4956,6 +4883,7 @@
         <a:solidFill>
           <a:srgbClr val="1E2761"/>
         </a:solidFill>
+        <a:effectLst/>
       </p:bgPr>
     </p:bg>
     <p:spTree>
@@ -4993,11 +4921,11 @@
           <a:bodyPr wrap="square" lIns="0" tIns="0" rIns="0" bIns="0" rtlCol="0" anchor="ctr"/>
           <a:lstStyle/>
           <a:p>
-            <a:pPr indent="0" marL="0">
-              <a:buNone/>
-            </a:pPr>
-            <a:r>
-              <a:rPr lang="en-US" sz="1100" b="1" spc="200" kern="0" dirty="0">
+            <a:pPr marL="0" indent="0">
+              <a:buNone/>
+            </a:pPr>
+            <a:r>
+              <a:rPr lang="en-US" sz="1100" b="1" kern="0" spc="200" dirty="0">
                 <a:solidFill>
                   <a:srgbClr val="D4A017"/>
                 </a:solidFill>
@@ -5032,7 +4960,7 @@
           <a:bodyPr wrap="square" lIns="0" tIns="0" rIns="0" bIns="0" rtlCol="0" anchor="ctr"/>
           <a:lstStyle/>
           <a:p>
-            <a:pPr indent="0" marL="0">
+            <a:pPr marL="0" indent="0">
               <a:buNone/>
             </a:pPr>
             <a:r>
@@ -5182,6 +5110,13 @@
             <a:prstDash val="solid"/>
           </a:ln>
         </p:spPr>
+        <p:txBody>
+          <a:bodyPr/>
+          <a:lstStyle/>
+          <a:p>
+            <a:endParaRPr lang="en-US"/>
+          </a:p>
+        </p:txBody>
       </p:sp>
       <p:sp>
         <p:nvSpPr>
@@ -5204,7 +5139,7 @@
           <a:bodyPr wrap="square" lIns="0" tIns="0" rIns="0" bIns="0" rtlCol="0" anchor="ctr"/>
           <a:lstStyle/>
           <a:p>
-            <a:pPr indent="0" marL="0">
+            <a:pPr marL="0" indent="0">
               <a:buNone/>
             </a:pPr>
             <a:r>
@@ -5218,9 +5153,6 @@
               </a:rPr>
               <a:t>EXIT TICKET   </a:t>
             </a:r>
-            <a:pPr indent="0" marL="0">
-              <a:buNone/>
-            </a:pPr>
             <a:r>
               <a:rPr lang="en-US" sz="1300" dirty="0">
                 <a:solidFill>
@@ -5233,45 +5165,6 @@
               <a:t>Modify createList so it reads each value with scanf instead of using i * 10. What line changes, and what stays exactly the same?</a:t>
             </a:r>
             <a:endParaRPr lang="en-US" sz="1300" dirty="0"/>
-          </a:p>
-        </p:txBody>
-      </p:sp>
-      <p:sp>
-        <p:nvSpPr>
-          <p:cNvPr id="7" name="Text 5"/>
-          <p:cNvSpPr/>
-          <p:nvPr/>
-        </p:nvSpPr>
-        <p:spPr>
-          <a:xfrm>
-            <a:off x="640080" y="4828032"/>
-            <a:ext cx="7863840" cy="256032"/>
-          </a:xfrm>
-          <a:prstGeom prst="rect">
-            <a:avLst/>
-          </a:prstGeom>
-          <a:noFill/>
-          <a:ln/>
-        </p:spPr>
-        <p:txBody>
-          <a:bodyPr wrap="square" lIns="0" tIns="0" rIns="0" bIns="0" rtlCol="0" anchor="ctr"/>
-          <a:lstStyle/>
-          <a:p>
-            <a:pPr indent="0" marL="0">
-              <a:buNone/>
-            </a:pPr>
-            <a:r>
-              <a:rPr lang="en-US" sz="1050" i="1" dirty="0">
-                <a:solidFill>
-                  <a:srgbClr val="CADCFC"/>
-                </a:solidFill>
-                <a:latin typeface="Calibri" pitchFamily="34" charset="0"/>
-                <a:ea typeface="Calibri" pitchFamily="34" charset="-122"/>
-                <a:cs typeface="Calibri" pitchFamily="34" charset="-120"/>
-              </a:rPr>
-              <a:t>Next lecture: insertion operations — at the front, at the end, and in the middle</a:t>
-            </a:r>
-            <a:endParaRPr lang="en-US" sz="1050" dirty="0"/>
           </a:p>
         </p:txBody>
       </p:sp>
@@ -5321,11 +5214,11 @@
           <a:bodyPr wrap="square" lIns="0" tIns="0" rIns="0" bIns="0" rtlCol="0" anchor="ctr"/>
           <a:lstStyle/>
           <a:p>
-            <a:pPr indent="0" marL="0">
-              <a:buNone/>
-            </a:pPr>
-            <a:r>
-              <a:rPr lang="en-US" sz="1100" b="1" spc="200" kern="0" dirty="0">
+            <a:pPr marL="0" indent="0">
+              <a:buNone/>
+            </a:pPr>
+            <a:r>
+              <a:rPr lang="en-US" sz="1100" b="1" kern="0" spc="200" dirty="0">
                 <a:solidFill>
                   <a:srgbClr val="028090"/>
                 </a:solidFill>
@@ -5360,7 +5253,7 @@
           <a:bodyPr wrap="square" lIns="0" tIns="0" rIns="0" bIns="0" rtlCol="0" anchor="ctr"/>
           <a:lstStyle/>
           <a:p>
-            <a:pPr indent="0" marL="0">
+            <a:pPr marL="0" indent="0">
               <a:buNone/>
             </a:pPr>
             <a:r>
@@ -5399,7 +5292,7 @@
           <a:bodyPr wrap="square" lIns="0" tIns="0" rIns="0" bIns="0" rtlCol="0" anchor="ctr"/>
           <a:lstStyle/>
           <a:p>
-            <a:pPr indent="0" marL="0">
+            <a:pPr marL="0" indent="0">
               <a:buNone/>
             </a:pPr>
             <a:r>
@@ -5438,7 +5331,7 @@
           <a:bodyPr wrap="square" lIns="0" tIns="0" rIns="0" bIns="0" rtlCol="0" anchor="ctr"/>
           <a:lstStyle/>
           <a:p>
-            <a:pPr algn="r" indent="0" marL="0">
+            <a:pPr marL="0" indent="0" algn="r">
               <a:buNone/>
             </a:pPr>
             <a:r>
@@ -5482,6 +5375,13 @@
             <a:prstDash val="solid"/>
           </a:ln>
         </p:spPr>
+        <p:txBody>
+          <a:bodyPr/>
+          <a:lstStyle/>
+          <a:p>
+            <a:endParaRPr lang="en-US"/>
+          </a:p>
+        </p:txBody>
       </p:sp>
       <p:sp>
         <p:nvSpPr>
@@ -5504,7 +5404,7 @@
           <a:bodyPr wrap="square" lIns="0" tIns="0" rIns="0" bIns="0" rtlCol="0" anchor="ctr"/>
           <a:lstStyle/>
           <a:p>
-            <a:pPr indent="0" marL="0">
+            <a:pPr marL="0" indent="0">
               <a:buNone/>
             </a:pPr>
             <a:r>
@@ -5519,9 +5419,6 @@
               <a:t>Lecture 15's pattern, three times over
 </a:t>
             </a:r>
-            <a:pPr indent="0" marL="0">
-              <a:buNone/>
-            </a:pPr>
             <a:r>
               <a:rPr lang="en-US" sz="1300" dirty="0">
                 <a:solidFill>
@@ -5536,7 +5433,7 @@
             <a:endParaRPr lang="en-US" sz="1250" dirty="0"/>
           </a:p>
           <a:p>
-            <a:pPr indent="0" marL="0">
+            <a:pPr marL="0" indent="0">
               <a:buNone/>
             </a:pPr>
             <a:r>
@@ -5636,86 +5533,6 @@
               <a:t>That pointer is usually called tail (or last) — today's genuinely new character.</a:t>
             </a:r>
             <a:endParaRPr lang="en-US" sz="1400" dirty="0"/>
-          </a:p>
-        </p:txBody>
-      </p:sp>
-      <p:sp>
-        <p:nvSpPr>
-          <p:cNvPr id="9" name="Shape 7"/>
-          <p:cNvSpPr/>
-          <p:nvPr/>
-        </p:nvSpPr>
-        <p:spPr>
-          <a:xfrm>
-            <a:off x="457200" y="4160520"/>
-            <a:ext cx="8229600" cy="502920"/>
-          </a:xfrm>
-          <a:prstGeom prst="roundRect">
-            <a:avLst>
-              <a:gd name="adj" fmla="val 12727"/>
-            </a:avLst>
-          </a:prstGeom>
-          <a:solidFill>
-            <a:srgbClr val="EEF3FB"/>
-          </a:solidFill>
-          <a:ln w="12700">
-            <a:solidFill>
-              <a:srgbClr val="1E2761"/>
-            </a:solidFill>
-            <a:prstDash val="solid"/>
-          </a:ln>
-        </p:spPr>
-      </p:sp>
-      <p:sp>
-        <p:nvSpPr>
-          <p:cNvPr id="10" name="Text 8"/>
-          <p:cNvSpPr/>
-          <p:nvPr/>
-        </p:nvSpPr>
-        <p:spPr>
-          <a:xfrm>
-            <a:off x="640080" y="4160520"/>
-            <a:ext cx="7863840" cy="502920"/>
-          </a:xfrm>
-          <a:prstGeom prst="rect">
-            <a:avLst/>
-          </a:prstGeom>
-          <a:noFill/>
-          <a:ln/>
-        </p:spPr>
-        <p:txBody>
-          <a:bodyPr wrap="square" lIns="0" tIns="0" rIns="0" bIns="0" rtlCol="0" anchor="ctr"/>
-          <a:lstStyle/>
-          <a:p>
-            <a:pPr indent="0" marL="0">
-              <a:buNone/>
-            </a:pPr>
-            <a:r>
-              <a:rPr lang="en-US" sz="1200" b="1" dirty="0">
-                <a:solidFill>
-                  <a:srgbClr val="1E2761"/>
-                </a:solidFill>
-                <a:latin typeface="Calibri" pitchFamily="34" charset="0"/>
-                <a:ea typeface="Calibri" pitchFamily="34" charset="-122"/>
-                <a:cs typeface="Calibri" pitchFamily="34" charset="-120"/>
-              </a:rPr>
-              <a:t>ASK   </a:t>
-            </a:r>
-            <a:pPr indent="0" marL="0">
-              <a:buNone/>
-            </a:pPr>
-            <a:r>
-              <a:rPr lang="en-US" sz="1250" i="1" dirty="0">
-                <a:solidFill>
-                  <a:srgbClr val="2B2B2B"/>
-                </a:solidFill>
-                <a:latin typeface="Calibri" pitchFamily="34" charset="0"/>
-                <a:ea typeface="Calibri" pitchFamily="34" charset="-122"/>
-                <a:cs typeface="Calibri" pitchFamily="34" charset="-120"/>
-              </a:rPr>
-              <a:t>Without a tail pointer, how would you find 'the last node' to attach a new one? What would that cost?</a:t>
-            </a:r>
-            <a:endParaRPr lang="en-US" sz="1200" dirty="0"/>
           </a:p>
         </p:txBody>
       </p:sp>
@@ -5765,11 +5582,11 @@
           <a:bodyPr wrap="square" lIns="0" tIns="0" rIns="0" bIns="0" rtlCol="0" anchor="ctr"/>
           <a:lstStyle/>
           <a:p>
-            <a:pPr indent="0" marL="0">
-              <a:buNone/>
-            </a:pPr>
-            <a:r>
-              <a:rPr lang="en-US" sz="1100" b="1" spc="200" kern="0" dirty="0">
+            <a:pPr marL="0" indent="0">
+              <a:buNone/>
+            </a:pPr>
+            <a:r>
+              <a:rPr lang="en-US" sz="1100" b="1" kern="0" spc="200" dirty="0">
                 <a:solidFill>
                   <a:srgbClr val="028090"/>
                 </a:solidFill>
@@ -5804,7 +5621,7 @@
           <a:bodyPr wrap="square" lIns="0" tIns="0" rIns="0" bIns="0" rtlCol="0" anchor="ctr"/>
           <a:lstStyle/>
           <a:p>
-            <a:pPr indent="0" marL="0">
+            <a:pPr marL="0" indent="0">
               <a:buNone/>
             </a:pPr>
             <a:r>
@@ -5843,7 +5660,7 @@
           <a:bodyPr wrap="square" lIns="0" tIns="0" rIns="0" bIns="0" rtlCol="0" anchor="ctr"/>
           <a:lstStyle/>
           <a:p>
-            <a:pPr indent="0" marL="0">
+            <a:pPr marL="0" indent="0">
               <a:buNone/>
             </a:pPr>
             <a:r>
@@ -5882,7 +5699,7 @@
           <a:bodyPr wrap="square" lIns="0" tIns="0" rIns="0" bIns="0" rtlCol="0" anchor="ctr"/>
           <a:lstStyle/>
           <a:p>
-            <a:pPr algn="r" indent="0" marL="0">
+            <a:pPr marL="0" indent="0" algn="r">
               <a:buNone/>
             </a:pPr>
             <a:r>
@@ -5921,7 +5738,7 @@
           <a:bodyPr wrap="square" lIns="0" tIns="0" rIns="0" bIns="0" rtlCol="0" anchor="ctr"/>
           <a:lstStyle/>
           <a:p>
-            <a:pPr indent="0" marL="0">
+            <a:pPr marL="0" indent="0">
               <a:buNone/>
             </a:pPr>
             <a:r>
@@ -5960,7 +5777,7 @@
           <a:bodyPr wrap="square" lIns="0" tIns="0" rIns="0" bIns="0" rtlCol="0" anchor="ctr"/>
           <a:lstStyle/>
           <a:p>
-            <a:pPr indent="0" marL="0">
+            <a:pPr marL="0" indent="0">
               <a:buNone/>
             </a:pPr>
             <a:r>
@@ -5999,7 +5816,7 @@
           <a:bodyPr wrap="square" lIns="0" tIns="0" rIns="0" bIns="0" rtlCol="0" anchor="ctr"/>
           <a:lstStyle/>
           <a:p>
-            <a:pPr indent="0" marL="0">
+            <a:pPr marL="0" indent="0">
               <a:buNone/>
             </a:pPr>
             <a:r>
@@ -6038,7 +5855,7 @@
           <a:bodyPr wrap="square" lIns="0" tIns="0" rIns="0" bIns="0" rtlCol="0" anchor="ctr"/>
           <a:lstStyle/>
           <a:p>
-            <a:pPr indent="0" marL="0">
+            <a:pPr marL="0" indent="0">
               <a:buNone/>
             </a:pPr>
             <a:r>
@@ -6077,7 +5894,7 @@
           <a:bodyPr wrap="square" lIns="0" tIns="0" rIns="0" bIns="0" rtlCol="0" anchor="ctr"/>
           <a:lstStyle/>
           <a:p>
-            <a:pPr indent="0" marL="0">
+            <a:pPr marL="0" indent="0">
               <a:buNone/>
             </a:pPr>
             <a:r>
@@ -6116,7 +5933,7 @@
           <a:bodyPr wrap="square" lIns="0" tIns="0" rIns="0" bIns="0" rtlCol="0" anchor="ctr"/>
           <a:lstStyle/>
           <a:p>
-            <a:pPr indent="0" marL="0">
+            <a:pPr marL="0" indent="0">
               <a:buNone/>
             </a:pPr>
             <a:r>
@@ -6155,7 +5972,7 @@
           <a:bodyPr wrap="square" lIns="0" tIns="0" rIns="0" bIns="0" rtlCol="0" anchor="ctr"/>
           <a:lstStyle/>
           <a:p>
-            <a:pPr indent="0" marL="0">
+            <a:pPr marL="0" indent="0">
               <a:buNone/>
             </a:pPr>
             <a:r>
@@ -6194,7 +6011,7 @@
           <a:bodyPr wrap="square" lIns="0" tIns="0" rIns="0" bIns="0" rtlCol="0" anchor="ctr"/>
           <a:lstStyle/>
           <a:p>
-            <a:pPr indent="0" marL="0">
+            <a:pPr marL="0" indent="0">
               <a:buNone/>
             </a:pPr>
             <a:r>
@@ -6233,7 +6050,7 @@
           <a:bodyPr wrap="square" lIns="0" tIns="0" rIns="0" bIns="0" rtlCol="0" anchor="ctr"/>
           <a:lstStyle/>
           <a:p>
-            <a:pPr indent="0" marL="0">
+            <a:pPr marL="0" indent="0">
               <a:buNone/>
             </a:pPr>
             <a:r>
@@ -6272,7 +6089,7 @@
           <a:bodyPr wrap="square" lIns="0" tIns="0" rIns="0" bIns="0" rtlCol="0" anchor="ctr"/>
           <a:lstStyle/>
           <a:p>
-            <a:pPr indent="0" marL="0">
+            <a:pPr marL="0" indent="0">
               <a:buNone/>
             </a:pPr>
             <a:r>
@@ -6311,7 +6128,7 @@
           <a:bodyPr wrap="square" lIns="0" tIns="0" rIns="0" bIns="0" rtlCol="0" anchor="ctr"/>
           <a:lstStyle/>
           <a:p>
-            <a:pPr indent="0" marL="0">
+            <a:pPr marL="0" indent="0">
               <a:buNone/>
             </a:pPr>
             <a:r>
@@ -6350,7 +6167,7 @@
           <a:bodyPr wrap="square" lIns="0" tIns="0" rIns="0" bIns="0" rtlCol="0" anchor="ctr"/>
           <a:lstStyle/>
           <a:p>
-            <a:pPr indent="0" marL="0">
+            <a:pPr marL="0" indent="0">
               <a:buNone/>
             </a:pPr>
             <a:r>
@@ -6389,7 +6206,7 @@
           <a:bodyPr wrap="square" lIns="0" tIns="0" rIns="0" bIns="0" rtlCol="0" anchor="ctr"/>
           <a:lstStyle/>
           <a:p>
-            <a:pPr indent="0" marL="0">
+            <a:pPr marL="0" indent="0">
               <a:buNone/>
             </a:pPr>
             <a:r>
@@ -6428,7 +6245,7 @@
           <a:bodyPr wrap="square" lIns="0" tIns="0" rIns="0" bIns="0" rtlCol="0" anchor="ctr"/>
           <a:lstStyle/>
           <a:p>
-            <a:pPr indent="0" marL="0">
+            <a:pPr marL="0" indent="0">
               <a:buNone/>
             </a:pPr>
             <a:r>
@@ -6467,7 +6284,7 @@
           <a:bodyPr wrap="square" lIns="0" tIns="0" rIns="0" bIns="0" rtlCol="0" anchor="ctr"/>
           <a:lstStyle/>
           <a:p>
-            <a:pPr indent="0" marL="0">
+            <a:pPr marL="0" indent="0">
               <a:buNone/>
             </a:pPr>
             <a:r>
@@ -6506,7 +6323,7 @@
           <a:bodyPr wrap="square" lIns="0" tIns="0" rIns="0" bIns="0" rtlCol="0" anchor="ctr"/>
           <a:lstStyle/>
           <a:p>
-            <a:pPr indent="0" marL="0">
+            <a:pPr marL="0" indent="0">
               <a:buNone/>
             </a:pPr>
             <a:r>
@@ -6570,11 +6387,11 @@
           <a:bodyPr wrap="square" lIns="0" tIns="0" rIns="0" bIns="0" rtlCol="0" anchor="ctr"/>
           <a:lstStyle/>
           <a:p>
-            <a:pPr indent="0" marL="0">
-              <a:buNone/>
-            </a:pPr>
-            <a:r>
-              <a:rPr lang="en-US" sz="1100" b="1" spc="200" kern="0" dirty="0">
+            <a:pPr marL="0" indent="0">
+              <a:buNone/>
+            </a:pPr>
+            <a:r>
+              <a:rPr lang="en-US" sz="1100" b="1" kern="0" spc="200" dirty="0">
                 <a:solidFill>
                   <a:srgbClr val="028090"/>
                 </a:solidFill>
@@ -6609,7 +6426,7 @@
           <a:bodyPr wrap="square" lIns="0" tIns="0" rIns="0" bIns="0" rtlCol="0" anchor="ctr"/>
           <a:lstStyle/>
           <a:p>
-            <a:pPr indent="0" marL="0">
+            <a:pPr marL="0" indent="0">
               <a:buNone/>
             </a:pPr>
             <a:r>
@@ -6648,7 +6465,7 @@
           <a:bodyPr wrap="square" lIns="0" tIns="0" rIns="0" bIns="0" rtlCol="0" anchor="ctr"/>
           <a:lstStyle/>
           <a:p>
-            <a:pPr indent="0" marL="0">
+            <a:pPr marL="0" indent="0">
               <a:buNone/>
             </a:pPr>
             <a:r>
@@ -6687,7 +6504,7 @@
           <a:bodyPr wrap="square" lIns="0" tIns="0" rIns="0" bIns="0" rtlCol="0" anchor="ctr"/>
           <a:lstStyle/>
           <a:p>
-            <a:pPr algn="r" indent="0" marL="0">
+            <a:pPr marL="0" indent="0" algn="r">
               <a:buNone/>
             </a:pPr>
             <a:r>
@@ -6731,6 +6548,13 @@
             <a:prstDash val="solid"/>
           </a:ln>
         </p:spPr>
+        <p:txBody>
+          <a:bodyPr/>
+          <a:lstStyle/>
+          <a:p>
+            <a:endParaRPr lang="en-US"/>
+          </a:p>
+        </p:txBody>
       </p:sp>
       <p:sp>
         <p:nvSpPr>
@@ -6753,7 +6577,7 @@
           <a:bodyPr wrap="square" lIns="0" tIns="0" rIns="0" bIns="0" rtlCol="0" anchor="ctr"/>
           <a:lstStyle/>
           <a:p>
-            <a:pPr indent="0" marL="0">
+            <a:pPr marL="0" indent="0">
               <a:buNone/>
             </a:pPr>
             <a:r>
@@ -6768,9 +6592,6 @@
               <a:t>Every other node
 </a:t>
             </a:r>
-            <a:pPr indent="0" marL="0">
-              <a:buNone/>
-            </a:pPr>
             <a:r>
               <a:rPr lang="en-US" sz="1300" dirty="0">
                 <a:solidFill>
@@ -6785,7 +6606,7 @@
             <a:endParaRPr lang="en-US" sz="1250" dirty="0"/>
           </a:p>
           <a:p>
-            <a:pPr indent="0" marL="0">
+            <a:pPr marL="0" indent="0">
               <a:buNone/>
             </a:pPr>
             <a:r>
@@ -6829,6 +6650,13 @@
             <a:prstDash val="solid"/>
           </a:ln>
         </p:spPr>
+        <p:txBody>
+          <a:bodyPr/>
+          <a:lstStyle/>
+          <a:p>
+            <a:endParaRPr lang="en-US"/>
+          </a:p>
+        </p:txBody>
       </p:sp>
       <p:sp>
         <p:nvSpPr>
@@ -6851,7 +6679,7 @@
           <a:bodyPr wrap="square" lIns="0" tIns="0" rIns="0" bIns="0" rtlCol="0" anchor="ctr"/>
           <a:lstStyle/>
           <a:p>
-            <a:pPr indent="0" marL="0">
+            <a:pPr marL="0" indent="0">
               <a:buNone/>
             </a:pPr>
             <a:r>
@@ -6866,9 +6694,6 @@
               <a:t>The FIRST node
 </a:t>
             </a:r>
-            <a:pPr indent="0" marL="0">
-              <a:buNone/>
-            </a:pPr>
             <a:r>
               <a:rPr lang="en-US" sz="1300" dirty="0">
                 <a:solidFill>
@@ -6883,7 +6708,7 @@
             <a:endParaRPr lang="en-US" sz="1250" dirty="0"/>
           </a:p>
           <a:p>
-            <a:pPr indent="0" marL="0">
+            <a:pPr marL="0" indent="0">
               <a:buNone/>
             </a:pPr>
             <a:r>
@@ -7032,11 +6857,11 @@
           <a:bodyPr wrap="square" lIns="0" tIns="0" rIns="0" bIns="0" rtlCol="0" anchor="ctr"/>
           <a:lstStyle/>
           <a:p>
-            <a:pPr indent="0" marL="0">
-              <a:buNone/>
-            </a:pPr>
-            <a:r>
-              <a:rPr lang="en-US" sz="1100" b="1" spc="200" kern="0" dirty="0">
+            <a:pPr marL="0" indent="0">
+              <a:buNone/>
+            </a:pPr>
+            <a:r>
+              <a:rPr lang="en-US" sz="1100" b="1" kern="0" spc="200" dirty="0">
                 <a:solidFill>
                   <a:srgbClr val="028090"/>
                 </a:solidFill>
@@ -7071,7 +6896,7 @@
           <a:bodyPr wrap="square" lIns="0" tIns="0" rIns="0" bIns="0" rtlCol="0" anchor="ctr"/>
           <a:lstStyle/>
           <a:p>
-            <a:pPr indent="0" marL="0">
+            <a:pPr marL="0" indent="0">
               <a:buNone/>
             </a:pPr>
             <a:r>
@@ -7110,7 +6935,7 @@
           <a:bodyPr wrap="square" lIns="0" tIns="0" rIns="0" bIns="0" rtlCol="0" anchor="ctr"/>
           <a:lstStyle/>
           <a:p>
-            <a:pPr indent="0" marL="0">
+            <a:pPr marL="0" indent="0">
               <a:buNone/>
             </a:pPr>
             <a:r>
@@ -7149,7 +6974,7 @@
           <a:bodyPr wrap="square" lIns="0" tIns="0" rIns="0" bIns="0" rtlCol="0" anchor="ctr"/>
           <a:lstStyle/>
           <a:p>
-            <a:pPr algn="r" indent="0" marL="0">
+            <a:pPr marL="0" indent="0" algn="r">
               <a:buNone/>
             </a:pPr>
             <a:r>
@@ -7193,6 +7018,13 @@
             <a:prstDash val="solid"/>
           </a:ln>
         </p:spPr>
+        <p:txBody>
+          <a:bodyPr/>
+          <a:lstStyle/>
+          <a:p>
+            <a:endParaRPr lang="en-US"/>
+          </a:p>
+        </p:txBody>
       </p:sp>
       <p:sp>
         <p:nvSpPr>
@@ -7215,7 +7047,7 @@
           <a:bodyPr wrap="square" lIns="0" tIns="0" rIns="0" bIns="0" rtlCol="0" anchor="t"/>
           <a:lstStyle/>
           <a:p>
-            <a:pPr indent="0" marL="0">
+            <a:pPr marL="0" indent="0">
               <a:lnSpc>
                 <a:spcPct val="100000"/>
               </a:lnSpc>
@@ -7235,7 +7067,7 @@
             <a:endParaRPr lang="en-US" sz="1050" dirty="0"/>
           </a:p>
           <a:p>
-            <a:pPr indent="0" marL="0">
+            <a:pPr marL="0" indent="0">
               <a:lnSpc>
                 <a:spcPct val="100000"/>
               </a:lnSpc>
@@ -7255,7 +7087,7 @@
             <a:endParaRPr lang="en-US" sz="1050" dirty="0"/>
           </a:p>
           <a:p>
-            <a:pPr indent="0" marL="0">
+            <a:pPr marL="0" indent="0">
               <a:lnSpc>
                 <a:spcPct val="100000"/>
               </a:lnSpc>
@@ -7275,7 +7107,7 @@
             <a:endParaRPr lang="en-US" sz="1050" dirty="0"/>
           </a:p>
           <a:p>
-            <a:pPr indent="0" marL="0">
+            <a:pPr marL="0" indent="0">
               <a:lnSpc>
                 <a:spcPct val="100000"/>
               </a:lnSpc>
@@ -7295,7 +7127,7 @@
             <a:endParaRPr lang="en-US" sz="1050" dirty="0"/>
           </a:p>
           <a:p>
-            <a:pPr indent="0" marL="0">
+            <a:pPr marL="0" indent="0">
               <a:lnSpc>
                 <a:spcPct val="100000"/>
               </a:lnSpc>
@@ -7304,7 +7136,7 @@
             <a:endParaRPr lang="en-US" sz="1050" dirty="0"/>
           </a:p>
           <a:p>
-            <a:pPr indent="0" marL="0">
+            <a:pPr marL="0" indent="0">
               <a:lnSpc>
                 <a:spcPct val="100000"/>
               </a:lnSpc>
@@ -7324,7 +7156,7 @@
             <a:endParaRPr lang="en-US" sz="1050" dirty="0"/>
           </a:p>
           <a:p>
-            <a:pPr indent="0" marL="0">
+            <a:pPr marL="0" indent="0">
               <a:lnSpc>
                 <a:spcPct val="100000"/>
               </a:lnSpc>
@@ -7344,7 +7176,7 @@
             <a:endParaRPr lang="en-US" sz="1050" dirty="0"/>
           </a:p>
           <a:p>
-            <a:pPr indent="0" marL="0">
+            <a:pPr marL="0" indent="0">
               <a:lnSpc>
                 <a:spcPct val="100000"/>
               </a:lnSpc>
@@ -7364,7 +7196,7 @@
             <a:endParaRPr lang="en-US" sz="1050" dirty="0"/>
           </a:p>
           <a:p>
-            <a:pPr indent="0" marL="0">
+            <a:pPr marL="0" indent="0">
               <a:lnSpc>
                 <a:spcPct val="100000"/>
               </a:lnSpc>
@@ -7384,7 +7216,7 @@
             <a:endParaRPr lang="en-US" sz="1050" dirty="0"/>
           </a:p>
           <a:p>
-            <a:pPr indent="0" marL="0">
+            <a:pPr marL="0" indent="0">
               <a:lnSpc>
                 <a:spcPct val="100000"/>
               </a:lnSpc>
@@ -7393,7 +7225,7 @@
             <a:endParaRPr lang="en-US" sz="1050" dirty="0"/>
           </a:p>
           <a:p>
-            <a:pPr indent="0" marL="0">
+            <a:pPr marL="0" indent="0">
               <a:lnSpc>
                 <a:spcPct val="100000"/>
               </a:lnSpc>
@@ -7413,7 +7245,7 @@
             <a:endParaRPr lang="en-US" sz="1050" dirty="0"/>
           </a:p>
           <a:p>
-            <a:pPr indent="0" marL="0">
+            <a:pPr marL="0" indent="0">
               <a:lnSpc>
                 <a:spcPct val="100000"/>
               </a:lnSpc>
@@ -7433,7 +7265,7 @@
             <a:endParaRPr lang="en-US" sz="1050" dirty="0"/>
           </a:p>
           <a:p>
-            <a:pPr indent="0" marL="0">
+            <a:pPr marL="0" indent="0">
               <a:lnSpc>
                 <a:spcPct val="100000"/>
               </a:lnSpc>
@@ -7442,7 +7274,7 @@
             <a:endParaRPr lang="en-US" sz="1050" dirty="0"/>
           </a:p>
           <a:p>
-            <a:pPr indent="0" marL="0">
+            <a:pPr marL="0" indent="0">
               <a:lnSpc>
                 <a:spcPct val="100000"/>
               </a:lnSpc>
@@ -7462,7 +7294,7 @@
             <a:endParaRPr lang="en-US" sz="1050" dirty="0"/>
           </a:p>
           <a:p>
-            <a:pPr indent="0" marL="0">
+            <a:pPr marL="0" indent="0">
               <a:lnSpc>
                 <a:spcPct val="100000"/>
               </a:lnSpc>
@@ -7482,7 +7314,7 @@
             <a:endParaRPr lang="en-US" sz="1050" dirty="0"/>
           </a:p>
           <a:p>
-            <a:pPr indent="0" marL="0">
+            <a:pPr marL="0" indent="0">
               <a:lnSpc>
                 <a:spcPct val="100000"/>
               </a:lnSpc>
@@ -7502,7 +7334,7 @@
             <a:endParaRPr lang="en-US" sz="1050" dirty="0"/>
           </a:p>
           <a:p>
-            <a:pPr indent="0" marL="0">
+            <a:pPr marL="0" indent="0">
               <a:lnSpc>
                 <a:spcPct val="100000"/>
               </a:lnSpc>
@@ -7522,7 +7354,7 @@
             <a:endParaRPr lang="en-US" sz="1050" dirty="0"/>
           </a:p>
           <a:p>
-            <a:pPr indent="0" marL="0">
+            <a:pPr marL="0" indent="0">
               <a:lnSpc>
                 <a:spcPct val="100000"/>
               </a:lnSpc>
@@ -7531,7 +7363,7 @@
             <a:endParaRPr lang="en-US" sz="1050" dirty="0"/>
           </a:p>
           <a:p>
-            <a:pPr indent="0" marL="0">
+            <a:pPr marL="0" indent="0">
               <a:lnSpc>
                 <a:spcPct val="100000"/>
               </a:lnSpc>
@@ -7551,7 +7383,7 @@
             <a:endParaRPr lang="en-US" sz="1050" dirty="0"/>
           </a:p>
           <a:p>
-            <a:pPr indent="0" marL="0">
+            <a:pPr marL="0" indent="0">
               <a:lnSpc>
                 <a:spcPct val="100000"/>
               </a:lnSpc>
@@ -7571,7 +7403,7 @@
             <a:endParaRPr lang="en-US" sz="1050" dirty="0"/>
           </a:p>
           <a:p>
-            <a:pPr indent="0" marL="0">
+            <a:pPr marL="0" indent="0">
               <a:lnSpc>
                 <a:spcPct val="100000"/>
               </a:lnSpc>
@@ -7591,7 +7423,7 @@
             <a:endParaRPr lang="en-US" sz="1050" dirty="0"/>
           </a:p>
           <a:p>
-            <a:pPr indent="0" marL="0">
+            <a:pPr marL="0" indent="0">
               <a:lnSpc>
                 <a:spcPct val="100000"/>
               </a:lnSpc>
@@ -7743,11 +7575,11 @@
           <a:bodyPr wrap="square" lIns="0" tIns="0" rIns="0" bIns="0" rtlCol="0" anchor="ctr"/>
           <a:lstStyle/>
           <a:p>
-            <a:pPr indent="0" marL="0">
-              <a:buNone/>
-            </a:pPr>
-            <a:r>
-              <a:rPr lang="en-US" sz="1100" b="1" spc="200" kern="0" dirty="0">
+            <a:pPr marL="0" indent="0">
+              <a:buNone/>
+            </a:pPr>
+            <a:r>
+              <a:rPr lang="en-US" sz="1100" b="1" kern="0" spc="200" dirty="0">
                 <a:solidFill>
                   <a:srgbClr val="028090"/>
                 </a:solidFill>
@@ -7782,7 +7614,7 @@
           <a:bodyPr wrap="square" lIns="0" tIns="0" rIns="0" bIns="0" rtlCol="0" anchor="ctr"/>
           <a:lstStyle/>
           <a:p>
-            <a:pPr indent="0" marL="0">
+            <a:pPr marL="0" indent="0">
               <a:buNone/>
             </a:pPr>
             <a:r>
@@ -7821,7 +7653,7 @@
           <a:bodyPr wrap="square" lIns="0" tIns="0" rIns="0" bIns="0" rtlCol="0" anchor="ctr"/>
           <a:lstStyle/>
           <a:p>
-            <a:pPr indent="0" marL="0">
+            <a:pPr marL="0" indent="0">
               <a:buNone/>
             </a:pPr>
             <a:r>
@@ -7860,7 +7692,7 @@
           <a:bodyPr wrap="square" lIns="0" tIns="0" rIns="0" bIns="0" rtlCol="0" anchor="ctr"/>
           <a:lstStyle/>
           <a:p>
-            <a:pPr algn="r" indent="0" marL="0">
+            <a:pPr marL="0" indent="0" algn="r">
               <a:buNone/>
             </a:pPr>
             <a:r>
@@ -7894,18 +7726,48 @@
         </p:nvGraphicFramePr>
         <p:xfrm>
           <a:off x="457200" y="1234440"/>
-          <a:ext cx="8229600" cy="914400"/>
+          <a:ext cx="8229600" cy="2011680"/>
         </p:xfrm>
         <a:graphic>
           <a:graphicData uri="http://schemas.openxmlformats.org/drawingml/2006/table">
             <a:tbl>
               <a:tblPr/>
               <a:tblGrid>
-                <a:gridCol w="640080"/>
-                <a:gridCol w="1463040"/>
-                <a:gridCol w="1097280"/>
-                <a:gridCol w="1097280"/>
-                <a:gridCol w="3931920"/>
+                <a:gridCol w="640080">
+                  <a:extLst>
+                    <a:ext uri="{9D8B030D-6E8A-4147-A177-3AD203B41FA5}">
+                      <a16:colId xmlns:a16="http://schemas.microsoft.com/office/drawing/2014/main" val="20000"/>
+                    </a:ext>
+                  </a:extLst>
+                </a:gridCol>
+                <a:gridCol w="1463040">
+                  <a:extLst>
+                    <a:ext uri="{9D8B030D-6E8A-4147-A177-3AD203B41FA5}">
+                      <a16:colId xmlns:a16="http://schemas.microsoft.com/office/drawing/2014/main" val="20001"/>
+                    </a:ext>
+                  </a:extLst>
+                </a:gridCol>
+                <a:gridCol w="1097280">
+                  <a:extLst>
+                    <a:ext uri="{9D8B030D-6E8A-4147-A177-3AD203B41FA5}">
+                      <a16:colId xmlns:a16="http://schemas.microsoft.com/office/drawing/2014/main" val="20002"/>
+                    </a:ext>
+                  </a:extLst>
+                </a:gridCol>
+                <a:gridCol w="1097280">
+                  <a:extLst>
+                    <a:ext uri="{9D8B030D-6E8A-4147-A177-3AD203B41FA5}">
+                      <a16:colId xmlns:a16="http://schemas.microsoft.com/office/drawing/2014/main" val="20003"/>
+                    </a:ext>
+                  </a:extLst>
+                </a:gridCol>
+                <a:gridCol w="3931920">
+                  <a:extLst>
+                    <a:ext uri="{9D8B030D-6E8A-4147-A177-3AD203B41FA5}">
+                      <a16:colId xmlns:a16="http://schemas.microsoft.com/office/drawing/2014/main" val="20004"/>
+                    </a:ext>
+                  </a:extLst>
+                </a:gridCol>
               </a:tblGrid>
               <a:tr h="502920">
                 <a:tc>
@@ -7913,7 +7775,7 @@
                     <a:bodyPr/>
                     <a:lstStyle/>
                     <a:p>
-                      <a:pPr algn="ctr" indent="0" marL="0">
+                      <a:pPr marL="0" indent="0" algn="ctr">
                         <a:buNone/>
                       </a:pPr>
                       <a:r>
@@ -7934,7 +7796,7 @@
                       </a:endParaRPr>
                     </a:p>
                   </a:txBody>
-                  <a:tcPr marL="91440" marR="91440" marT="45720" marB="45720" anchor="ctr">
+                  <a:tcPr anchor="ctr">
                     <a:lnL w="9525" cap="flat" cmpd="sng" algn="ctr">
                       <a:solidFill>
                         <a:srgbClr val="D9D9D9"/>
@@ -7981,7 +7843,7 @@
                     <a:bodyPr/>
                     <a:lstStyle/>
                     <a:p>
-                      <a:pPr algn="ctr" indent="0" marL="0">
+                      <a:pPr marL="0" indent="0" algn="ctr">
                         <a:buNone/>
                       </a:pPr>
                       <a:r>
@@ -8002,7 +7864,7 @@
                       </a:endParaRPr>
                     </a:p>
                   </a:txBody>
-                  <a:tcPr marL="91440" marR="91440" marT="45720" marB="45720" anchor="ctr">
+                  <a:tcPr anchor="ctr">
                     <a:lnL w="9525" cap="flat" cmpd="sng" algn="ctr">
                       <a:solidFill>
                         <a:srgbClr val="D9D9D9"/>
@@ -8049,7 +7911,7 @@
                     <a:bodyPr/>
                     <a:lstStyle/>
                     <a:p>
-                      <a:pPr algn="ctr" indent="0" marL="0">
+                      <a:pPr marL="0" indent="0" algn="ctr">
                         <a:buNone/>
                       </a:pPr>
                       <a:r>
@@ -8070,7 +7932,7 @@
                       </a:endParaRPr>
                     </a:p>
                   </a:txBody>
-                  <a:tcPr marL="91440" marR="91440" marT="45720" marB="45720" anchor="ctr">
+                  <a:tcPr anchor="ctr">
                     <a:lnL w="9525" cap="flat" cmpd="sng" algn="ctr">
                       <a:solidFill>
                         <a:srgbClr val="D9D9D9"/>
@@ -8117,7 +7979,7 @@
                     <a:bodyPr/>
                     <a:lstStyle/>
                     <a:p>
-                      <a:pPr algn="ctr" indent="0" marL="0">
+                      <a:pPr marL="0" indent="0" algn="ctr">
                         <a:buNone/>
                       </a:pPr>
                       <a:r>
@@ -8138,7 +8000,7 @@
                       </a:endParaRPr>
                     </a:p>
                   </a:txBody>
-                  <a:tcPr marL="91440" marR="91440" marT="45720" marB="45720" anchor="ctr">
+                  <a:tcPr anchor="ctr">
                     <a:lnL w="9525" cap="flat" cmpd="sng" algn="ctr">
                       <a:solidFill>
                         <a:srgbClr val="D9D9D9"/>
@@ -8185,7 +8047,7 @@
                     <a:bodyPr/>
                     <a:lstStyle/>
                     <a:p>
-                      <a:pPr algn="ctr" indent="0" marL="0">
+                      <a:pPr marL="0" indent="0" algn="ctr">
                         <a:buNone/>
                       </a:pPr>
                       <a:r>
@@ -8206,7 +8068,7 @@
                       </a:endParaRPr>
                     </a:p>
                   </a:txBody>
-                  <a:tcPr marL="91440" marR="91440" marT="45720" marB="45720" anchor="ctr">
+                  <a:tcPr anchor="ctr">
                     <a:lnL w="9525" cap="flat" cmpd="sng" algn="ctr">
                       <a:solidFill>
                         <a:srgbClr val="D9D9D9"/>
@@ -8248,6 +8110,11 @@
                     </a:solidFill>
                   </a:tcPr>
                 </a:tc>
+                <a:extLst>
+                  <a:ext uri="{0D108BD9-81ED-4DB2-BD59-A6C34878D82A}">
+                    <a16:rowId xmlns:a16="http://schemas.microsoft.com/office/drawing/2014/main" val="10000"/>
+                  </a:ext>
+                </a:extLst>
               </a:tr>
               <a:tr h="502920">
                 <a:tc>
@@ -8255,7 +8122,7 @@
                     <a:bodyPr/>
                     <a:lstStyle/>
                     <a:p>
-                      <a:pPr algn="ctr" indent="0" marL="0">
+                      <a:pPr marL="0" indent="0" algn="ctr">
                         <a:buNone/>
                       </a:pPr>
                       <a:r>
@@ -8276,7 +8143,7 @@
                       </a:endParaRPr>
                     </a:p>
                   </a:txBody>
-                  <a:tcPr marL="91440" marR="91440" marT="45720" marB="45720" anchor="ctr">
+                  <a:tcPr anchor="ctr">
                     <a:lnL w="9525" cap="flat" cmpd="sng" algn="ctr">
                       <a:solidFill>
                         <a:srgbClr val="D9D9D9"/>
@@ -8320,7 +8187,7 @@
                     <a:bodyPr/>
                     <a:lstStyle/>
                     <a:p>
-                      <a:pPr algn="ctr" indent="0" marL="0">
+                      <a:pPr marL="0" indent="0" algn="ctr">
                         <a:buNone/>
                       </a:pPr>
                       <a:r>
@@ -8341,7 +8208,7 @@
                       </a:endParaRPr>
                     </a:p>
                   </a:txBody>
-                  <a:tcPr marL="91440" marR="91440" marT="45720" marB="45720" anchor="ctr">
+                  <a:tcPr anchor="ctr">
                     <a:lnL w="9525" cap="flat" cmpd="sng" algn="ctr">
                       <a:solidFill>
                         <a:srgbClr val="D9D9D9"/>
@@ -8385,7 +8252,7 @@
                     <a:bodyPr/>
                     <a:lstStyle/>
                     <a:p>
-                      <a:pPr algn="ctr" indent="0" marL="0">
+                      <a:pPr marL="0" indent="0" algn="ctr">
                         <a:buNone/>
                       </a:pPr>
                       <a:r>
@@ -8406,7 +8273,7 @@
                       </a:endParaRPr>
                     </a:p>
                   </a:txBody>
-                  <a:tcPr marL="91440" marR="91440" marT="45720" marB="45720" anchor="ctr">
+                  <a:tcPr anchor="ctr">
                     <a:lnL w="9525" cap="flat" cmpd="sng" algn="ctr">
                       <a:solidFill>
                         <a:srgbClr val="D9D9D9"/>
@@ -8450,7 +8317,7 @@
                     <a:bodyPr/>
                     <a:lstStyle/>
                     <a:p>
-                      <a:pPr algn="ctr" indent="0" marL="0">
+                      <a:pPr marL="0" indent="0" algn="ctr">
                         <a:buNone/>
                       </a:pPr>
                       <a:r>
@@ -8471,7 +8338,7 @@
                       </a:endParaRPr>
                     </a:p>
                   </a:txBody>
-                  <a:tcPr marL="91440" marR="91440" marT="45720" marB="45720" anchor="ctr">
+                  <a:tcPr anchor="ctr">
                     <a:lnL w="9525" cap="flat" cmpd="sng" algn="ctr">
                       <a:solidFill>
                         <a:srgbClr val="D9D9D9"/>
@@ -8515,7 +8382,7 @@
                     <a:bodyPr/>
                     <a:lstStyle/>
                     <a:p>
-                      <a:pPr algn="l" indent="0" marL="0">
+                      <a:pPr marL="0" indent="0" algn="l">
                         <a:buNone/>
                       </a:pPr>
                       <a:r>
@@ -8536,7 +8403,7 @@
                       </a:endParaRPr>
                     </a:p>
                   </a:txBody>
-                  <a:tcPr marL="91440" marR="91440" marT="45720" marB="45720" anchor="ctr">
+                  <a:tcPr anchor="ctr">
                     <a:lnL w="9525" cap="flat" cmpd="sng" algn="ctr">
                       <a:solidFill>
                         <a:srgbClr val="D9D9D9"/>
@@ -8575,6 +8442,11 @@
                     </a:lnB>
                   </a:tcPr>
                 </a:tc>
+                <a:extLst>
+                  <a:ext uri="{0D108BD9-81ED-4DB2-BD59-A6C34878D82A}">
+                    <a16:rowId xmlns:a16="http://schemas.microsoft.com/office/drawing/2014/main" val="10001"/>
+                  </a:ext>
+                </a:extLst>
               </a:tr>
               <a:tr h="502920">
                 <a:tc>
@@ -8582,7 +8454,7 @@
                     <a:bodyPr/>
                     <a:lstStyle/>
                     <a:p>
-                      <a:pPr algn="ctr" indent="0" marL="0">
+                      <a:pPr marL="0" indent="0" algn="ctr">
                         <a:buNone/>
                       </a:pPr>
                       <a:r>
@@ -8603,7 +8475,7 @@
                       </a:endParaRPr>
                     </a:p>
                   </a:txBody>
-                  <a:tcPr marL="91440" marR="91440" marT="45720" marB="45720" anchor="ctr">
+                  <a:tcPr anchor="ctr">
                     <a:lnL w="9525" cap="flat" cmpd="sng" algn="ctr">
                       <a:solidFill>
                         <a:srgbClr val="D9D9D9"/>
@@ -8647,7 +8519,7 @@
                     <a:bodyPr/>
                     <a:lstStyle/>
                     <a:p>
-                      <a:pPr algn="ctr" indent="0" marL="0">
+                      <a:pPr marL="0" indent="0" algn="ctr">
                         <a:buNone/>
                       </a:pPr>
                       <a:r>
@@ -8668,7 +8540,7 @@
                       </a:endParaRPr>
                     </a:p>
                   </a:txBody>
-                  <a:tcPr marL="91440" marR="91440" marT="45720" marB="45720" anchor="ctr">
+                  <a:tcPr anchor="ctr">
                     <a:lnL w="9525" cap="flat" cmpd="sng" algn="ctr">
                       <a:solidFill>
                         <a:srgbClr val="D9D9D9"/>
@@ -8712,7 +8584,7 @@
                     <a:bodyPr/>
                     <a:lstStyle/>
                     <a:p>
-                      <a:pPr algn="ctr" indent="0" marL="0">
+                      <a:pPr marL="0" indent="0" algn="ctr">
                         <a:buNone/>
                       </a:pPr>
                       <a:r>
@@ -8733,7 +8605,7 @@
                       </a:endParaRPr>
                     </a:p>
                   </a:txBody>
-                  <a:tcPr marL="91440" marR="91440" marT="45720" marB="45720" anchor="ctr">
+                  <a:tcPr anchor="ctr">
                     <a:lnL w="9525" cap="flat" cmpd="sng" algn="ctr">
                       <a:solidFill>
                         <a:srgbClr val="D9D9D9"/>
@@ -8777,7 +8649,7 @@
                     <a:bodyPr/>
                     <a:lstStyle/>
                     <a:p>
-                      <a:pPr algn="ctr" indent="0" marL="0">
+                      <a:pPr marL="0" indent="0" algn="ctr">
                         <a:buNone/>
                       </a:pPr>
                       <a:r>
@@ -8798,7 +8670,7 @@
                       </a:endParaRPr>
                     </a:p>
                   </a:txBody>
-                  <a:tcPr marL="91440" marR="91440" marT="45720" marB="45720" anchor="ctr">
+                  <a:tcPr anchor="ctr">
                     <a:lnL w="9525" cap="flat" cmpd="sng" algn="ctr">
                       <a:solidFill>
                         <a:srgbClr val="D9D9D9"/>
@@ -8842,7 +8714,7 @@
                     <a:bodyPr/>
                     <a:lstStyle/>
                     <a:p>
-                      <a:pPr algn="l" indent="0" marL="0">
+                      <a:pPr marL="0" indent="0" algn="l">
                         <a:buNone/>
                       </a:pPr>
                       <a:r>
@@ -8863,7 +8735,7 @@
                       </a:endParaRPr>
                     </a:p>
                   </a:txBody>
-                  <a:tcPr marL="91440" marR="91440" marT="45720" marB="45720" anchor="ctr">
+                  <a:tcPr anchor="ctr">
                     <a:lnL w="9525" cap="flat" cmpd="sng" algn="ctr">
                       <a:solidFill>
                         <a:srgbClr val="D9D9D9"/>
@@ -8902,6 +8774,11 @@
                     </a:lnB>
                   </a:tcPr>
                 </a:tc>
+                <a:extLst>
+                  <a:ext uri="{0D108BD9-81ED-4DB2-BD59-A6C34878D82A}">
+                    <a16:rowId xmlns:a16="http://schemas.microsoft.com/office/drawing/2014/main" val="10002"/>
+                  </a:ext>
+                </a:extLst>
               </a:tr>
               <a:tr h="502920">
                 <a:tc>
@@ -8909,7 +8786,7 @@
                     <a:bodyPr/>
                     <a:lstStyle/>
                     <a:p>
-                      <a:pPr algn="ctr" indent="0" marL="0">
+                      <a:pPr marL="0" indent="0" algn="ctr">
                         <a:buNone/>
                       </a:pPr>
                       <a:r>
@@ -8930,7 +8807,7 @@
                       </a:endParaRPr>
                     </a:p>
                   </a:txBody>
-                  <a:tcPr marL="91440" marR="91440" marT="45720" marB="45720" anchor="ctr">
+                  <a:tcPr anchor="ctr">
                     <a:lnL w="9525" cap="flat" cmpd="sng" algn="ctr">
                       <a:solidFill>
                         <a:srgbClr val="D9D9D9"/>
@@ -8974,7 +8851,7 @@
                     <a:bodyPr/>
                     <a:lstStyle/>
                     <a:p>
-                      <a:pPr algn="ctr" indent="0" marL="0">
+                      <a:pPr marL="0" indent="0" algn="ctr">
                         <a:buNone/>
                       </a:pPr>
                       <a:r>
@@ -8995,7 +8872,7 @@
                       </a:endParaRPr>
                     </a:p>
                   </a:txBody>
-                  <a:tcPr marL="91440" marR="91440" marT="45720" marB="45720" anchor="ctr">
+                  <a:tcPr anchor="ctr">
                     <a:lnL w="9525" cap="flat" cmpd="sng" algn="ctr">
                       <a:solidFill>
                         <a:srgbClr val="D9D9D9"/>
@@ -9039,7 +8916,7 @@
                     <a:bodyPr/>
                     <a:lstStyle/>
                     <a:p>
-                      <a:pPr algn="ctr" indent="0" marL="0">
+                      <a:pPr marL="0" indent="0" algn="ctr">
                         <a:buNone/>
                       </a:pPr>
                       <a:r>
@@ -9060,7 +8937,7 @@
                       </a:endParaRPr>
                     </a:p>
                   </a:txBody>
-                  <a:tcPr marL="91440" marR="91440" marT="45720" marB="45720" anchor="ctr">
+                  <a:tcPr anchor="ctr">
                     <a:lnL w="9525" cap="flat" cmpd="sng" algn="ctr">
                       <a:solidFill>
                         <a:srgbClr val="D9D9D9"/>
@@ -9104,7 +8981,7 @@
                     <a:bodyPr/>
                     <a:lstStyle/>
                     <a:p>
-                      <a:pPr algn="ctr" indent="0" marL="0">
+                      <a:pPr marL="0" indent="0" algn="ctr">
                         <a:buNone/>
                       </a:pPr>
                       <a:r>
@@ -9125,7 +9002,7 @@
                       </a:endParaRPr>
                     </a:p>
                   </a:txBody>
-                  <a:tcPr marL="91440" marR="91440" marT="45720" marB="45720" anchor="ctr">
+                  <a:tcPr anchor="ctr">
                     <a:lnL w="9525" cap="flat" cmpd="sng" algn="ctr">
                       <a:solidFill>
                         <a:srgbClr val="D9D9D9"/>
@@ -9169,7 +9046,7 @@
                     <a:bodyPr/>
                     <a:lstStyle/>
                     <a:p>
-                      <a:pPr algn="l" indent="0" marL="0">
+                      <a:pPr marL="0" indent="0" algn="l">
                         <a:buNone/>
                       </a:pPr>
                       <a:r>
@@ -9190,7 +9067,7 @@
                       </a:endParaRPr>
                     </a:p>
                   </a:txBody>
-                  <a:tcPr marL="91440" marR="91440" marT="45720" marB="45720" anchor="ctr">
+                  <a:tcPr anchor="ctr">
                     <a:lnL w="9525" cap="flat" cmpd="sng" algn="ctr">
                       <a:solidFill>
                         <a:srgbClr val="D9D9D9"/>
@@ -9229,6 +9106,11 @@
                     </a:lnB>
                   </a:tcPr>
                 </a:tc>
+                <a:extLst>
+                  <a:ext uri="{0D108BD9-81ED-4DB2-BD59-A6C34878D82A}">
+                    <a16:rowId xmlns:a16="http://schemas.microsoft.com/office/drawing/2014/main" val="10003"/>
+                  </a:ext>
+                </a:extLst>
               </a:tr>
             </a:tbl>
           </a:graphicData>
@@ -9236,7 +9118,7 @@
       </p:graphicFrame>
       <p:sp>
         <p:nvSpPr>
-          <p:cNvPr id="7" name="Text 4"/>
+          <p:cNvPr id="6" name="Text 4"/>
           <p:cNvSpPr/>
           <p:nvPr/>
         </p:nvSpPr>
@@ -9255,7 +9137,7 @@
           <a:bodyPr wrap="square" lIns="0" tIns="0" rIns="0" bIns="0" rtlCol="0" anchor="ctr"/>
           <a:lstStyle/>
           <a:p>
-            <a:pPr indent="0" marL="0">
+            <a:pPr marL="0" indent="0">
               <a:buNone/>
             </a:pPr>
             <a:r>
@@ -9319,11 +9201,11 @@
           <a:bodyPr wrap="square" lIns="0" tIns="0" rIns="0" bIns="0" rtlCol="0" anchor="ctr"/>
           <a:lstStyle/>
           <a:p>
-            <a:pPr indent="0" marL="0">
-              <a:buNone/>
-            </a:pPr>
-            <a:r>
-              <a:rPr lang="en-US" sz="1100" b="1" spc="200" kern="0" dirty="0">
+            <a:pPr marL="0" indent="0">
+              <a:buNone/>
+            </a:pPr>
+            <a:r>
+              <a:rPr lang="en-US" sz="1100" b="1" kern="0" spc="200" dirty="0">
                 <a:solidFill>
                   <a:srgbClr val="028090"/>
                 </a:solidFill>
@@ -9358,7 +9240,7 @@
           <a:bodyPr wrap="square" lIns="0" tIns="0" rIns="0" bIns="0" rtlCol="0" anchor="ctr"/>
           <a:lstStyle/>
           <a:p>
-            <a:pPr indent="0" marL="0">
+            <a:pPr marL="0" indent="0">
               <a:buNone/>
             </a:pPr>
             <a:r>
@@ -9397,7 +9279,7 @@
           <a:bodyPr wrap="square" lIns="0" tIns="0" rIns="0" bIns="0" rtlCol="0" anchor="ctr"/>
           <a:lstStyle/>
           <a:p>
-            <a:pPr indent="0" marL="0">
+            <a:pPr marL="0" indent="0">
               <a:buNone/>
             </a:pPr>
             <a:r>
@@ -9436,7 +9318,7 @@
           <a:bodyPr wrap="square" lIns="0" tIns="0" rIns="0" bIns="0" rtlCol="0" anchor="ctr"/>
           <a:lstStyle/>
           <a:p>
-            <a:pPr algn="r" indent="0" marL="0">
+            <a:pPr marL="0" indent="0" algn="r">
               <a:buNone/>
             </a:pPr>
             <a:r>
@@ -9480,6 +9362,13 @@
             <a:prstDash val="solid"/>
           </a:ln>
         </p:spPr>
+        <p:txBody>
+          <a:bodyPr/>
+          <a:lstStyle/>
+          <a:p>
+            <a:endParaRPr lang="en-US"/>
+          </a:p>
+        </p:txBody>
       </p:sp>
       <p:sp>
         <p:nvSpPr>
@@ -9502,7 +9391,7 @@
           <a:bodyPr wrap="square" lIns="0" tIns="0" rIns="0" bIns="0" rtlCol="0" anchor="t"/>
           <a:lstStyle/>
           <a:p>
-            <a:pPr indent="0" marL="0">
+            <a:pPr marL="0" indent="0">
               <a:lnSpc>
                 <a:spcPct val="100000"/>
               </a:lnSpc>
@@ -9522,7 +9411,7 @@
             <a:endParaRPr lang="en-US" sz="1250" dirty="0"/>
           </a:p>
           <a:p>
-            <a:pPr indent="0" marL="0">
+            <a:pPr marL="0" indent="0">
               <a:lnSpc>
                 <a:spcPct val="100000"/>
               </a:lnSpc>
@@ -9542,7 +9431,7 @@
             <a:endParaRPr lang="en-US" sz="1250" dirty="0"/>
           </a:p>
           <a:p>
-            <a:pPr indent="0" marL="0">
+            <a:pPr marL="0" indent="0">
               <a:lnSpc>
                 <a:spcPct val="100000"/>
               </a:lnSpc>
@@ -9562,7 +9451,7 @@
             <a:endParaRPr lang="en-US" sz="1250" dirty="0"/>
           </a:p>
           <a:p>
-            <a:pPr indent="0" marL="0">
+            <a:pPr marL="0" indent="0">
               <a:lnSpc>
                 <a:spcPct val="100000"/>
               </a:lnSpc>
@@ -9582,7 +9471,7 @@
             <a:endParaRPr lang="en-US" sz="1250" dirty="0"/>
           </a:p>
           <a:p>
-            <a:pPr indent="0" marL="0">
+            <a:pPr marL="0" indent="0">
               <a:lnSpc>
                 <a:spcPct val="100000"/>
               </a:lnSpc>
@@ -9602,7 +9491,7 @@
             <a:endParaRPr lang="en-US" sz="1250" dirty="0"/>
           </a:p>
           <a:p>
-            <a:pPr indent="0" marL="0">
+            <a:pPr marL="0" indent="0">
               <a:lnSpc>
                 <a:spcPct val="100000"/>
               </a:lnSpc>
@@ -9622,7 +9511,7 @@
             <a:endParaRPr lang="en-US" sz="1250" dirty="0"/>
           </a:p>
           <a:p>
-            <a:pPr indent="0" marL="0">
+            <a:pPr marL="0" indent="0">
               <a:lnSpc>
                 <a:spcPct val="100000"/>
               </a:lnSpc>
@@ -9642,7 +9531,7 @@
             <a:endParaRPr lang="en-US" sz="1250" dirty="0"/>
           </a:p>
           <a:p>
-            <a:pPr indent="0" marL="0">
+            <a:pPr marL="0" indent="0">
               <a:lnSpc>
                 <a:spcPct val="100000"/>
               </a:lnSpc>
@@ -9662,7 +9551,7 @@
             <a:endParaRPr lang="en-US" sz="1250" dirty="0"/>
           </a:p>
           <a:p>
-            <a:pPr indent="0" marL="0">
+            <a:pPr marL="0" indent="0">
               <a:lnSpc>
                 <a:spcPct val="100000"/>
               </a:lnSpc>
@@ -9814,11 +9703,11 @@
           <a:bodyPr wrap="square" lIns="0" tIns="0" rIns="0" bIns="0" rtlCol="0" anchor="ctr"/>
           <a:lstStyle/>
           <a:p>
-            <a:pPr indent="0" marL="0">
-              <a:buNone/>
-            </a:pPr>
-            <a:r>
-              <a:rPr lang="en-US" sz="1100" b="1" spc="200" kern="0" dirty="0">
+            <a:pPr marL="0" indent="0">
+              <a:buNone/>
+            </a:pPr>
+            <a:r>
+              <a:rPr lang="en-US" sz="1100" b="1" kern="0" spc="200" dirty="0">
                 <a:solidFill>
                   <a:srgbClr val="028090"/>
                 </a:solidFill>
@@ -9853,7 +9742,7 @@
           <a:bodyPr wrap="square" lIns="0" tIns="0" rIns="0" bIns="0" rtlCol="0" anchor="ctr"/>
           <a:lstStyle/>
           <a:p>
-            <a:pPr indent="0" marL="0">
+            <a:pPr marL="0" indent="0">
               <a:buNone/>
             </a:pPr>
             <a:r>
@@ -9892,7 +9781,7 @@
           <a:bodyPr wrap="square" lIns="0" tIns="0" rIns="0" bIns="0" rtlCol="0" anchor="ctr"/>
           <a:lstStyle/>
           <a:p>
-            <a:pPr indent="0" marL="0">
+            <a:pPr marL="0" indent="0">
               <a:buNone/>
             </a:pPr>
             <a:r>
@@ -9931,7 +9820,7 @@
           <a:bodyPr wrap="square" lIns="0" tIns="0" rIns="0" bIns="0" rtlCol="0" anchor="ctr"/>
           <a:lstStyle/>
           <a:p>
-            <a:pPr algn="r" indent="0" marL="0">
+            <a:pPr marL="0" indent="0" algn="r">
               <a:buNone/>
             </a:pPr>
             <a:r>
@@ -9970,7 +9859,7 @@
           <a:bodyPr wrap="square" lIns="0" tIns="0" rIns="0" bIns="0" rtlCol="0" anchor="ctr"/>
           <a:lstStyle/>
           <a:p>
-            <a:pPr indent="0" marL="0">
+            <a:pPr marL="0" indent="0">
               <a:buNone/>
             </a:pPr>
             <a:r>
@@ -10009,7 +9898,7 @@
           <a:bodyPr wrap="square" lIns="0" tIns="0" rIns="0" bIns="0" rtlCol="0" anchor="ctr"/>
           <a:lstStyle/>
           <a:p>
-            <a:pPr indent="0" marL="0">
+            <a:pPr marL="0" indent="0">
               <a:buNone/>
             </a:pPr>
             <a:r>
@@ -10048,7 +9937,7 @@
           <a:bodyPr wrap="square" lIns="0" tIns="0" rIns="0" bIns="0" rtlCol="0" anchor="ctr"/>
           <a:lstStyle/>
           <a:p>
-            <a:pPr indent="0" marL="0">
+            <a:pPr marL="0" indent="0">
               <a:buNone/>
             </a:pPr>
             <a:r>
@@ -10087,7 +9976,7 @@
           <a:bodyPr wrap="square" lIns="0" tIns="0" rIns="0" bIns="0" rtlCol="0" anchor="ctr"/>
           <a:lstStyle/>
           <a:p>
-            <a:pPr indent="0" marL="0">
+            <a:pPr marL="0" indent="0">
               <a:buNone/>
             </a:pPr>
             <a:r>
@@ -10126,7 +10015,7 @@
           <a:bodyPr wrap="square" lIns="0" tIns="0" rIns="0" bIns="0" rtlCol="0" anchor="ctr"/>
           <a:lstStyle/>
           <a:p>
-            <a:pPr indent="0" marL="0">
+            <a:pPr marL="0" indent="0">
               <a:buNone/>
             </a:pPr>
             <a:r>
@@ -10165,7 +10054,7 @@
           <a:bodyPr wrap="square" lIns="0" tIns="0" rIns="0" bIns="0" rtlCol="0" anchor="ctr"/>
           <a:lstStyle/>
           <a:p>
-            <a:pPr indent="0" marL="0">
+            <a:pPr marL="0" indent="0">
               <a:buNone/>
             </a:pPr>
             <a:r>
@@ -10204,7 +10093,7 @@
           <a:bodyPr wrap="square" lIns="0" tIns="0" rIns="0" bIns="0" rtlCol="0" anchor="ctr"/>
           <a:lstStyle/>
           <a:p>
-            <a:pPr indent="0" marL="0">
+            <a:pPr marL="0" indent="0">
               <a:buNone/>
             </a:pPr>
             <a:r>
@@ -10243,7 +10132,7 @@
           <a:bodyPr wrap="square" lIns="0" tIns="0" rIns="0" bIns="0" rtlCol="0" anchor="ctr"/>
           <a:lstStyle/>
           <a:p>
-            <a:pPr indent="0" marL="0">
+            <a:pPr marL="0" indent="0">
               <a:buNone/>
             </a:pPr>
             <a:r>
@@ -10282,7 +10171,7 @@
           <a:bodyPr wrap="square" lIns="0" tIns="0" rIns="0" bIns="0" rtlCol="0" anchor="ctr"/>
           <a:lstStyle/>
           <a:p>
-            <a:pPr indent="0" marL="0">
+            <a:pPr marL="0" indent="0">
               <a:buNone/>
             </a:pPr>
             <a:r>
@@ -10321,7 +10210,7 @@
           <a:bodyPr wrap="square" lIns="0" tIns="0" rIns="0" bIns="0" rtlCol="0" anchor="ctr"/>
           <a:lstStyle/>
           <a:p>
-            <a:pPr indent="0" marL="0">
+            <a:pPr marL="0" indent="0">
               <a:buNone/>
             </a:pPr>
             <a:r>
@@ -10365,6 +10254,13 @@
             <a:prstDash val="solid"/>
           </a:ln>
         </p:spPr>
+        <p:txBody>
+          <a:bodyPr/>
+          <a:lstStyle/>
+          <a:p>
+            <a:endParaRPr lang="en-US"/>
+          </a:p>
+        </p:txBody>
       </p:sp>
       <p:sp>
         <p:nvSpPr>
@@ -10387,7 +10283,7 @@
           <a:bodyPr wrap="square" lIns="0" tIns="0" rIns="0" bIns="0" rtlCol="0" anchor="ctr"/>
           <a:lstStyle/>
           <a:p>
-            <a:pPr indent="0" marL="0">
+            <a:pPr marL="0" indent="0">
               <a:buNone/>
             </a:pPr>
             <a:r>
@@ -10451,11 +10347,11 @@
           <a:bodyPr wrap="square" lIns="0" tIns="0" rIns="0" bIns="0" rtlCol="0" anchor="ctr"/>
           <a:lstStyle/>
           <a:p>
-            <a:pPr indent="0" marL="0">
-              <a:buNone/>
-            </a:pPr>
-            <a:r>
-              <a:rPr lang="en-US" sz="1100" b="1" spc="200" kern="0" dirty="0">
+            <a:pPr marL="0" indent="0">
+              <a:buNone/>
+            </a:pPr>
+            <a:r>
+              <a:rPr lang="en-US" sz="1100" b="1" kern="0" spc="200" dirty="0">
                 <a:solidFill>
                   <a:srgbClr val="028090"/>
                 </a:solidFill>
@@ -10490,7 +10386,7 @@
           <a:bodyPr wrap="square" lIns="0" tIns="0" rIns="0" bIns="0" rtlCol="0" anchor="ctr"/>
           <a:lstStyle/>
           <a:p>
-            <a:pPr indent="0" marL="0">
+            <a:pPr marL="0" indent="0">
               <a:buNone/>
             </a:pPr>
             <a:r>
@@ -10529,7 +10425,7 @@
           <a:bodyPr wrap="square" lIns="0" tIns="0" rIns="0" bIns="0" rtlCol="0" anchor="ctr"/>
           <a:lstStyle/>
           <a:p>
-            <a:pPr indent="0" marL="0">
+            <a:pPr marL="0" indent="0">
               <a:buNone/>
             </a:pPr>
             <a:r>
@@ -10568,7 +10464,7 @@
           <a:bodyPr wrap="square" lIns="0" tIns="0" rIns="0" bIns="0" rtlCol="0" anchor="ctr"/>
           <a:lstStyle/>
           <a:p>
-            <a:pPr algn="r" indent="0" marL="0">
+            <a:pPr marL="0" indent="0" algn="r">
               <a:buNone/>
             </a:pPr>
             <a:r>
@@ -10612,6 +10508,13 @@
             <a:prstDash val="solid"/>
           </a:ln>
         </p:spPr>
+        <p:txBody>
+          <a:bodyPr/>
+          <a:lstStyle/>
+          <a:p>
+            <a:endParaRPr lang="en-US"/>
+          </a:p>
+        </p:txBody>
       </p:sp>
       <p:sp>
         <p:nvSpPr>
@@ -10634,7 +10537,7 @@
           <a:bodyPr wrap="square" lIns="0" tIns="0" rIns="0" bIns="0" rtlCol="0" anchor="t"/>
           <a:lstStyle/>
           <a:p>
-            <a:pPr indent="0" marL="0">
+            <a:pPr marL="0" indent="0">
               <a:lnSpc>
                 <a:spcPct val="100000"/>
               </a:lnSpc>
@@ -10654,7 +10557,7 @@
             <a:endParaRPr lang="en-US" sz="1150" dirty="0"/>
           </a:p>
           <a:p>
-            <a:pPr indent="0" marL="0">
+            <a:pPr marL="0" indent="0">
               <a:lnSpc>
                 <a:spcPct val="100000"/>
               </a:lnSpc>
@@ -10674,7 +10577,7 @@
             <a:endParaRPr lang="en-US" sz="1150" dirty="0"/>
           </a:p>
           <a:p>
-            <a:pPr indent="0" marL="0">
+            <a:pPr marL="0" indent="0">
               <a:lnSpc>
                 <a:spcPct val="100000"/>
               </a:lnSpc>
@@ -10694,7 +10597,7 @@
             <a:endParaRPr lang="en-US" sz="1150" dirty="0"/>
           </a:p>
           <a:p>
-            <a:pPr indent="0" marL="0">
+            <a:pPr marL="0" indent="0">
               <a:lnSpc>
                 <a:spcPct val="100000"/>
               </a:lnSpc>
@@ -10703,7 +10606,7 @@
             <a:endParaRPr lang="en-US" sz="1150" dirty="0"/>
           </a:p>
           <a:p>
-            <a:pPr indent="0" marL="0">
+            <a:pPr marL="0" indent="0">
               <a:lnSpc>
                 <a:spcPct val="100000"/>
               </a:lnSpc>
@@ -10723,7 +10626,7 @@
             <a:endParaRPr lang="en-US" sz="1150" dirty="0"/>
           </a:p>
           <a:p>
-            <a:pPr indent="0" marL="0">
+            <a:pPr marL="0" indent="0">
               <a:lnSpc>
                 <a:spcPct val="100000"/>
               </a:lnSpc>
@@ -10743,7 +10646,7 @@
             <a:endParaRPr lang="en-US" sz="1150" dirty="0"/>
           </a:p>
           <a:p>
-            <a:pPr indent="0" marL="0">
+            <a:pPr marL="0" indent="0">
               <a:lnSpc>
                 <a:spcPct val="100000"/>
               </a:lnSpc>
@@ -10763,7 +10666,7 @@
             <a:endParaRPr lang="en-US" sz="1150" dirty="0"/>
           </a:p>
           <a:p>
-            <a:pPr indent="0" marL="0">
+            <a:pPr marL="0" indent="0">
               <a:lnSpc>
                 <a:spcPct val="100000"/>
               </a:lnSpc>
@@ -10783,7 +10686,7 @@
             <a:endParaRPr lang="en-US" sz="1150" dirty="0"/>
           </a:p>
           <a:p>
-            <a:pPr indent="0" marL="0">
+            <a:pPr marL="0" indent="0">
               <a:lnSpc>
                 <a:spcPct val="100000"/>
               </a:lnSpc>
@@ -10803,7 +10706,7 @@
             <a:endParaRPr lang="en-US" sz="1150" dirty="0"/>
           </a:p>
           <a:p>
-            <a:pPr indent="0" marL="0">
+            <a:pPr marL="0" indent="0">
               <a:lnSpc>
                 <a:spcPct val="100000"/>
               </a:lnSpc>
@@ -10823,7 +10726,7 @@
             <a:endParaRPr lang="en-US" sz="1150" dirty="0"/>
           </a:p>
           <a:p>
-            <a:pPr indent="0" marL="0">
+            <a:pPr marL="0" indent="0">
               <a:lnSpc>
                 <a:spcPct val="100000"/>
               </a:lnSpc>
@@ -10843,7 +10746,7 @@
             <a:endParaRPr lang="en-US" sz="1150" dirty="0"/>
           </a:p>
           <a:p>
-            <a:pPr indent="0" marL="0">
+            <a:pPr marL="0" indent="0">
               <a:lnSpc>
                 <a:spcPct val="100000"/>
               </a:lnSpc>
@@ -10852,7 +10755,7 @@
             <a:endParaRPr lang="en-US" sz="1150" dirty="0"/>
           </a:p>
           <a:p>
-            <a:pPr indent="0" marL="0">
+            <a:pPr marL="0" indent="0">
               <a:lnSpc>
                 <a:spcPct val="100000"/>
               </a:lnSpc>
@@ -10872,7 +10775,7 @@
             <a:endParaRPr lang="en-US" sz="1150" dirty="0"/>
           </a:p>
           <a:p>
-            <a:pPr indent="0" marL="0">
+            <a:pPr marL="0" indent="0">
               <a:lnSpc>
                 <a:spcPct val="100000"/>
               </a:lnSpc>
@@ -10909,16 +10812,34 @@
         </p:nvGraphicFramePr>
         <p:xfrm>
           <a:off x="5486400" y="1280160"/>
-          <a:ext cx="3200400" cy="914400"/>
+          <a:ext cx="3200400" cy="2011680"/>
         </p:xfrm>
         <a:graphic>
           <a:graphicData uri="http://schemas.openxmlformats.org/drawingml/2006/table">
             <a:tbl>
               <a:tblPr/>
               <a:tblGrid>
-                <a:gridCol w="1463040"/>
-                <a:gridCol w="914400"/>
-                <a:gridCol w="822960"/>
+                <a:gridCol w="1463040">
+                  <a:extLst>
+                    <a:ext uri="{9D8B030D-6E8A-4147-A177-3AD203B41FA5}">
+                      <a16:colId xmlns:a16="http://schemas.microsoft.com/office/drawing/2014/main" val="20000"/>
+                    </a:ext>
+                  </a:extLst>
+                </a:gridCol>
+                <a:gridCol w="914400">
+                  <a:extLst>
+                    <a:ext uri="{9D8B030D-6E8A-4147-A177-3AD203B41FA5}">
+                      <a16:colId xmlns:a16="http://schemas.microsoft.com/office/drawing/2014/main" val="20001"/>
+                    </a:ext>
+                  </a:extLst>
+                </a:gridCol>
+                <a:gridCol w="822960">
+                  <a:extLst>
+                    <a:ext uri="{9D8B030D-6E8A-4147-A177-3AD203B41FA5}">
+                      <a16:colId xmlns:a16="http://schemas.microsoft.com/office/drawing/2014/main" val="20002"/>
+                    </a:ext>
+                  </a:extLst>
+                </a:gridCol>
               </a:tblGrid>
               <a:tr h="502920">
                 <a:tc>
@@ -10926,7 +10847,7 @@
                     <a:bodyPr/>
                     <a:lstStyle/>
                     <a:p>
-                      <a:pPr algn="ctr" indent="0" marL="0">
+                      <a:pPr marL="0" indent="0" algn="ctr">
                         <a:buNone/>
                       </a:pPr>
                       <a:r>
@@ -10947,7 +10868,7 @@
                       </a:endParaRPr>
                     </a:p>
                   </a:txBody>
-                  <a:tcPr marL="91440" marR="91440" marT="45720" marB="45720" anchor="ctr">
+                  <a:tcPr anchor="ctr">
                     <a:lnL w="9525" cap="flat" cmpd="sng" algn="ctr">
                       <a:solidFill>
                         <a:srgbClr val="D9D9D9"/>
@@ -10994,7 +10915,7 @@
                     <a:bodyPr/>
                     <a:lstStyle/>
                     <a:p>
-                      <a:pPr algn="ctr" indent="0" marL="0">
+                      <a:pPr marL="0" indent="0" algn="ctr">
                         <a:buNone/>
                       </a:pPr>
                       <a:r>
@@ -11015,7 +10936,7 @@
                       </a:endParaRPr>
                     </a:p>
                   </a:txBody>
-                  <a:tcPr marL="91440" marR="91440" marT="45720" marB="45720" anchor="ctr">
+                  <a:tcPr anchor="ctr">
                     <a:lnL w="9525" cap="flat" cmpd="sng" algn="ctr">
                       <a:solidFill>
                         <a:srgbClr val="D9D9D9"/>
@@ -11062,7 +10983,7 @@
                     <a:bodyPr/>
                     <a:lstStyle/>
                     <a:p>
-                      <a:pPr algn="ctr" indent="0" marL="0">
+                      <a:pPr marL="0" indent="0" algn="ctr">
                         <a:buNone/>
                       </a:pPr>
                       <a:r>
@@ -11083,7 +11004,7 @@
                       </a:endParaRPr>
                     </a:p>
                   </a:txBody>
-                  <a:tcPr marL="91440" marR="91440" marT="45720" marB="45720" anchor="ctr">
+                  <a:tcPr anchor="ctr">
                     <a:lnL w="9525" cap="flat" cmpd="sng" algn="ctr">
                       <a:solidFill>
                         <a:srgbClr val="D9D9D9"/>
@@ -11125,6 +11046,11 @@
                     </a:solidFill>
                   </a:tcPr>
                 </a:tc>
+                <a:extLst>
+                  <a:ext uri="{0D108BD9-81ED-4DB2-BD59-A6C34878D82A}">
+                    <a16:rowId xmlns:a16="http://schemas.microsoft.com/office/drawing/2014/main" val="10000"/>
+                  </a:ext>
+                </a:extLst>
               </a:tr>
               <a:tr h="502920">
                 <a:tc>
@@ -11132,7 +11058,7 @@
                     <a:bodyPr/>
                     <a:lstStyle/>
                     <a:p>
-                      <a:pPr algn="ctr" indent="0" marL="0">
+                      <a:pPr marL="0" indent="0" algn="ctr">
                         <a:buNone/>
                       </a:pPr>
                       <a:r>
@@ -11153,7 +11079,7 @@
                       </a:endParaRPr>
                     </a:p>
                   </a:txBody>
-                  <a:tcPr marL="91440" marR="91440" marT="45720" marB="45720" anchor="ctr">
+                  <a:tcPr anchor="ctr">
                     <a:lnL w="9525" cap="flat" cmpd="sng" algn="ctr">
                       <a:solidFill>
                         <a:srgbClr val="D9D9D9"/>
@@ -11197,7 +11123,7 @@
                     <a:bodyPr/>
                     <a:lstStyle/>
                     <a:p>
-                      <a:pPr algn="ctr" indent="0" marL="0">
+                      <a:pPr marL="0" indent="0" algn="ctr">
                         <a:buNone/>
                       </a:pPr>
                       <a:r>
@@ -11218,7 +11144,7 @@
                       </a:endParaRPr>
                     </a:p>
                   </a:txBody>
-                  <a:tcPr marL="91440" marR="91440" marT="45720" marB="45720" anchor="ctr">
+                  <a:tcPr anchor="ctr">
                     <a:lnL w="9525" cap="flat" cmpd="sng" algn="ctr">
                       <a:solidFill>
                         <a:srgbClr val="D9D9D9"/>
@@ -11262,7 +11188,7 @@
                     <a:bodyPr/>
                     <a:lstStyle/>
                     <a:p>
-                      <a:pPr algn="ctr" indent="0" marL="0">
+                      <a:pPr marL="0" indent="0" algn="ctr">
                         <a:buNone/>
                       </a:pPr>
                       <a:r>
@@ -11283,7 +11209,7 @@
                       </a:endParaRPr>
                     </a:p>
                   </a:txBody>
-                  <a:tcPr marL="91440" marR="91440" marT="45720" marB="45720" anchor="ctr">
+                  <a:tcPr anchor="ctr">
                     <a:lnL w="9525" cap="flat" cmpd="sng" algn="ctr">
                       <a:solidFill>
                         <a:srgbClr val="D9D9D9"/>
@@ -11322,6 +11248,11 @@
                     </a:lnB>
                   </a:tcPr>
                 </a:tc>
+                <a:extLst>
+                  <a:ext uri="{0D108BD9-81ED-4DB2-BD59-A6C34878D82A}">
+                    <a16:rowId xmlns:a16="http://schemas.microsoft.com/office/drawing/2014/main" val="10001"/>
+                  </a:ext>
+                </a:extLst>
               </a:tr>
               <a:tr h="502920">
                 <a:tc>
@@ -11329,7 +11260,7 @@
                     <a:bodyPr/>
                     <a:lstStyle/>
                     <a:p>
-                      <a:pPr algn="ctr" indent="0" marL="0">
+                      <a:pPr marL="0" indent="0" algn="ctr">
                         <a:buNone/>
                       </a:pPr>
                       <a:r>
@@ -11350,7 +11281,7 @@
                       </a:endParaRPr>
                     </a:p>
                   </a:txBody>
-                  <a:tcPr marL="91440" marR="91440" marT="45720" marB="45720" anchor="ctr">
+                  <a:tcPr anchor="ctr">
                     <a:lnL w="9525" cap="flat" cmpd="sng" algn="ctr">
                       <a:solidFill>
                         <a:srgbClr val="D9D9D9"/>
@@ -11394,7 +11325,7 @@
                     <a:bodyPr/>
                     <a:lstStyle/>
                     <a:p>
-                      <a:pPr algn="ctr" indent="0" marL="0">
+                      <a:pPr marL="0" indent="0" algn="ctr">
                         <a:buNone/>
                       </a:pPr>
                       <a:r>
@@ -11415,7 +11346,7 @@
                       </a:endParaRPr>
                     </a:p>
                   </a:txBody>
-                  <a:tcPr marL="91440" marR="91440" marT="45720" marB="45720" anchor="ctr">
+                  <a:tcPr anchor="ctr">
                     <a:lnL w="9525" cap="flat" cmpd="sng" algn="ctr">
                       <a:solidFill>
                         <a:srgbClr val="D9D9D9"/>
@@ -11459,7 +11390,7 @@
                     <a:bodyPr/>
                     <a:lstStyle/>
                     <a:p>
-                      <a:pPr algn="ctr" indent="0" marL="0">
+                      <a:pPr marL="0" indent="0" algn="ctr">
                         <a:buNone/>
                       </a:pPr>
                       <a:r>
@@ -11480,7 +11411,7 @@
                       </a:endParaRPr>
                     </a:p>
                   </a:txBody>
-                  <a:tcPr marL="91440" marR="91440" marT="45720" marB="45720" anchor="ctr">
+                  <a:tcPr anchor="ctr">
                     <a:lnL w="9525" cap="flat" cmpd="sng" algn="ctr">
                       <a:solidFill>
                         <a:srgbClr val="D9D9D9"/>
@@ -11519,6 +11450,11 @@
                     </a:lnB>
                   </a:tcPr>
                 </a:tc>
+                <a:extLst>
+                  <a:ext uri="{0D108BD9-81ED-4DB2-BD59-A6C34878D82A}">
+                    <a16:rowId xmlns:a16="http://schemas.microsoft.com/office/drawing/2014/main" val="10002"/>
+                  </a:ext>
+                </a:extLst>
               </a:tr>
               <a:tr h="502920">
                 <a:tc>
@@ -11526,7 +11462,7 @@
                     <a:bodyPr/>
                     <a:lstStyle/>
                     <a:p>
-                      <a:pPr algn="ctr" indent="0" marL="0">
+                      <a:pPr marL="0" indent="0" algn="ctr">
                         <a:buNone/>
                       </a:pPr>
                       <a:r>
@@ -11547,7 +11483,7 @@
                       </a:endParaRPr>
                     </a:p>
                   </a:txBody>
-                  <a:tcPr marL="91440" marR="91440" marT="45720" marB="45720" anchor="ctr">
+                  <a:tcPr anchor="ctr">
                     <a:lnL w="9525" cap="flat" cmpd="sng" algn="ctr">
                       <a:solidFill>
                         <a:srgbClr val="D9D9D9"/>
@@ -11591,7 +11527,7 @@
                     <a:bodyPr/>
                     <a:lstStyle/>
                     <a:p>
-                      <a:pPr algn="ctr" indent="0" marL="0">
+                      <a:pPr marL="0" indent="0" algn="ctr">
                         <a:buNone/>
                       </a:pPr>
                       <a:r>
@@ -11612,7 +11548,7 @@
                       </a:endParaRPr>
                     </a:p>
                   </a:txBody>
-                  <a:tcPr marL="91440" marR="91440" marT="45720" marB="45720" anchor="ctr">
+                  <a:tcPr anchor="ctr">
                     <a:lnL w="9525" cap="flat" cmpd="sng" algn="ctr">
                       <a:solidFill>
                         <a:srgbClr val="D9D9D9"/>
@@ -11656,7 +11592,7 @@
                     <a:bodyPr/>
                     <a:lstStyle/>
                     <a:p>
-                      <a:pPr algn="ctr" indent="0" marL="0">
+                      <a:pPr marL="0" indent="0" algn="ctr">
                         <a:buNone/>
                       </a:pPr>
                       <a:r>
@@ -11677,7 +11613,7 @@
                       </a:endParaRPr>
                     </a:p>
                   </a:txBody>
-                  <a:tcPr marL="91440" marR="91440" marT="45720" marB="45720" anchor="ctr">
+                  <a:tcPr anchor="ctr">
                     <a:lnL w="9525" cap="flat" cmpd="sng" algn="ctr">
                       <a:solidFill>
                         <a:srgbClr val="D9D9D9"/>
@@ -11716,91 +11652,16 @@
                     </a:lnB>
                   </a:tcPr>
                 </a:tc>
+                <a:extLst>
+                  <a:ext uri="{0D108BD9-81ED-4DB2-BD59-A6C34878D82A}">
+                    <a16:rowId xmlns:a16="http://schemas.microsoft.com/office/drawing/2014/main" val="10003"/>
+                  </a:ext>
+                </a:extLst>
               </a:tr>
             </a:tbl>
           </a:graphicData>
         </a:graphic>
       </p:graphicFrame>
-      <p:sp>
-        <p:nvSpPr>
-          <p:cNvPr id="9" name="Shape 6"/>
-          <p:cNvSpPr/>
-          <p:nvPr/>
-        </p:nvSpPr>
-        <p:spPr>
-          <a:xfrm>
-            <a:off x="457200" y="3794760"/>
-            <a:ext cx="8229600" cy="685800"/>
-          </a:xfrm>
-          <a:prstGeom prst="roundRect">
-            <a:avLst>
-              <a:gd name="adj" fmla="val 9333"/>
-            </a:avLst>
-          </a:prstGeom>
-          <a:solidFill>
-            <a:srgbClr val="EEF3FB"/>
-          </a:solidFill>
-          <a:ln w="12700">
-            <a:solidFill>
-              <a:srgbClr val="1E2761"/>
-            </a:solidFill>
-            <a:prstDash val="solid"/>
-          </a:ln>
-        </p:spPr>
-      </p:sp>
-      <p:sp>
-        <p:nvSpPr>
-          <p:cNvPr id="10" name="Text 7"/>
-          <p:cNvSpPr/>
-          <p:nvPr/>
-        </p:nvSpPr>
-        <p:spPr>
-          <a:xfrm>
-            <a:off x="640080" y="3794760"/>
-            <a:ext cx="7863840" cy="685800"/>
-          </a:xfrm>
-          <a:prstGeom prst="rect">
-            <a:avLst/>
-          </a:prstGeom>
-          <a:noFill/>
-          <a:ln/>
-        </p:spPr>
-        <p:txBody>
-          <a:bodyPr wrap="square" lIns="0" tIns="0" rIns="0" bIns="0" rtlCol="0" anchor="ctr"/>
-          <a:lstStyle/>
-          <a:p>
-            <a:pPr indent="0" marL="0">
-              <a:buNone/>
-            </a:pPr>
-            <a:r>
-              <a:rPr lang="en-US" sz="1200" b="1" dirty="0">
-                <a:solidFill>
-                  <a:srgbClr val="1E2761"/>
-                </a:solidFill>
-                <a:latin typeface="Calibri" pitchFamily="34" charset="0"/>
-                <a:ea typeface="Calibri" pitchFamily="34" charset="-122"/>
-                <a:cs typeface="Calibri" pitchFamily="34" charset="-120"/>
-              </a:rPr>
-              <a:t>ASK   </a:t>
-            </a:r>
-            <a:pPr indent="0" marL="0">
-              <a:buNone/>
-            </a:pPr>
-            <a:r>
-              <a:rPr lang="en-US" sz="1250" i="1" dirty="0">
-                <a:solidFill>
-                  <a:srgbClr val="2B2B2B"/>
-                </a:solidFill>
-                <a:latin typeface="Calibri" pitchFamily="34" charset="0"/>
-                <a:ea typeface="Calibri" pitchFamily="34" charset="-122"/>
-                <a:cs typeface="Calibri" pitchFamily="34" charset="-120"/>
-              </a:rPr>
-              <a:t>Unlike an array's linear search, could this search ever use binary search on a linked list? Why not?</a:t>
-            </a:r>
-            <a:endParaRPr lang="en-US" sz="1200" dirty="0"/>
-          </a:p>
-        </p:txBody>
-      </p:sp>
     </p:spTree>
   </p:cSld>
   <p:clrMapOvr>
@@ -12102,4 +11963,319 @@
     </a:ext>
   </a:extLst>
 </a:theme>
+</file>
+
+<file path=ppt/theme/theme2.xml><?xml version="1.0" encoding="utf-8"?>
+<a:theme xmlns:a="http://schemas.openxmlformats.org/drawingml/2006/main" name="Office Theme">
+  <a:themeElements>
+    <a:clrScheme name="Office">
+      <a:dk1>
+        <a:sysClr val="windowText" lastClr="000000"/>
+      </a:dk1>
+      <a:lt1>
+        <a:sysClr val="window" lastClr="FFFFFF"/>
+      </a:lt1>
+      <a:dk2>
+        <a:srgbClr val="0E2841"/>
+      </a:dk2>
+      <a:lt2>
+        <a:srgbClr val="E8E8E8"/>
+      </a:lt2>
+      <a:accent1>
+        <a:srgbClr val="156082"/>
+      </a:accent1>
+      <a:accent2>
+        <a:srgbClr val="E97132"/>
+      </a:accent2>
+      <a:accent3>
+        <a:srgbClr val="196B24"/>
+      </a:accent3>
+      <a:accent4>
+        <a:srgbClr val="0F9ED5"/>
+      </a:accent4>
+      <a:accent5>
+        <a:srgbClr val="A02B93"/>
+      </a:accent5>
+      <a:accent6>
+        <a:srgbClr val="4EA72E"/>
+      </a:accent6>
+      <a:hlink>
+        <a:srgbClr val="467886"/>
+      </a:hlink>
+      <a:folHlink>
+        <a:srgbClr val="96607D"/>
+      </a:folHlink>
+    </a:clrScheme>
+    <a:fontScheme name="Office">
+      <a:majorFont>
+        <a:latin typeface="Aptos Display" panose="02110004020202020204"/>
+        <a:ea typeface=""/>
+        <a:cs typeface=""/>
+        <a:font script="Jpan" typeface="游ゴシック Light"/>
+        <a:font script="Hang" typeface="맑은 고딕"/>
+        <a:font script="Hans" typeface="等线 Light"/>
+        <a:font script="Hant" typeface="新細明體"/>
+        <a:font script="Arab" typeface="Times New Roman"/>
+        <a:font script="Hebr" typeface="Times New Roman"/>
+        <a:font script="Thai" typeface="Angsana New"/>
+        <a:font script="Ethi" typeface="Nyala"/>
+        <a:font script="Beng" typeface="Vrinda"/>
+        <a:font script="Gujr" typeface="Shruti"/>
+        <a:font script="Khmr" typeface="MoolBoran"/>
+        <a:font script="Knda" typeface="Tunga"/>
+        <a:font script="Guru" typeface="Raavi"/>
+        <a:font script="Cans" typeface="Euphemia"/>
+        <a:font script="Cher" typeface="Plantagenet Cherokee"/>
+        <a:font script="Yiii" typeface="Microsoft Yi Baiti"/>
+        <a:font script="Tibt" typeface="Microsoft Himalaya"/>
+        <a:font script="Thaa" typeface="MV Boli"/>
+        <a:font script="Deva" typeface="Mangal"/>
+        <a:font script="Telu" typeface="Gautami"/>
+        <a:font script="Taml" typeface="Latha"/>
+        <a:font script="Syrc" typeface="Estrangelo Edessa"/>
+        <a:font script="Orya" typeface="Kalinga"/>
+        <a:font script="Mlym" typeface="Kartika"/>
+        <a:font script="Laoo" typeface="DokChampa"/>
+        <a:font script="Sinh" typeface="Iskoola Pota"/>
+        <a:font script="Mong" typeface="Mongolian Baiti"/>
+        <a:font script="Viet" typeface="Times New Roman"/>
+        <a:font script="Uigh" typeface="Microsoft Uighur"/>
+        <a:font script="Geor" typeface="Sylfaen"/>
+        <a:font script="Armn" typeface="Arial"/>
+        <a:font script="Bugi" typeface="Leelawadee UI"/>
+        <a:font script="Bopo" typeface="Microsoft JhengHei"/>
+        <a:font script="Java" typeface="Javanese Text"/>
+        <a:font script="Lisu" typeface="Segoe UI"/>
+        <a:font script="Mymr" typeface="Myanmar Text"/>
+        <a:font script="Nkoo" typeface="Ebrima"/>
+        <a:font script="Olck" typeface="Nirmala UI"/>
+        <a:font script="Osma" typeface="Ebrima"/>
+        <a:font script="Phag" typeface="Phagspa"/>
+        <a:font script="Syrn" typeface="Estrangelo Edessa"/>
+        <a:font script="Syrj" typeface="Estrangelo Edessa"/>
+        <a:font script="Syre" typeface="Estrangelo Edessa"/>
+        <a:font script="Sora" typeface="Nirmala UI"/>
+        <a:font script="Tale" typeface="Microsoft Tai Le"/>
+        <a:font script="Talu" typeface="Microsoft New Tai Lue"/>
+        <a:font script="Tfng" typeface="Ebrima"/>
+      </a:majorFont>
+      <a:minorFont>
+        <a:latin typeface="Aptos" panose="02110004020202020204"/>
+        <a:ea typeface=""/>
+        <a:cs typeface=""/>
+        <a:font script="Jpan" typeface="游ゴシック"/>
+        <a:font script="Hang" typeface="맑은 고딕"/>
+        <a:font script="Hans" typeface="等线"/>
+        <a:font script="Hant" typeface="新細明體"/>
+        <a:font script="Arab" typeface="Arial"/>
+        <a:font script="Hebr" typeface="Arial"/>
+        <a:font script="Thai" typeface="Cordia New"/>
+        <a:font script="Ethi" typeface="Nyala"/>
+        <a:font script="Beng" typeface="Vrinda"/>
+        <a:font script="Gujr" typeface="Shruti"/>
+        <a:font script="Khmr" typeface="DaunPenh"/>
+        <a:font script="Knda" typeface="Tunga"/>
+        <a:font script="Guru" typeface="Raavi"/>
+        <a:font script="Cans" typeface="Euphemia"/>
+        <a:font script="Cher" typeface="Plantagenet Cherokee"/>
+        <a:font script="Yiii" typeface="Microsoft Yi Baiti"/>
+        <a:font script="Tibt" typeface="Microsoft Himalaya"/>
+        <a:font script="Thaa" typeface="MV Boli"/>
+        <a:font script="Deva" typeface="Mangal"/>
+        <a:font script="Telu" typeface="Gautami"/>
+        <a:font script="Taml" typeface="Latha"/>
+        <a:font script="Syrc" typeface="Estrangelo Edessa"/>
+        <a:font script="Orya" typeface="Kalinga"/>
+        <a:font script="Mlym" typeface="Kartika"/>
+        <a:font script="Laoo" typeface="DokChampa"/>
+        <a:font script="Sinh" typeface="Iskoola Pota"/>
+        <a:font script="Mong" typeface="Mongolian Baiti"/>
+        <a:font script="Viet" typeface="Arial"/>
+        <a:font script="Uigh" typeface="Microsoft Uighur"/>
+        <a:font script="Geor" typeface="Sylfaen"/>
+        <a:font script="Armn" typeface="Arial"/>
+        <a:font script="Bugi" typeface="Leelawadee UI"/>
+        <a:font script="Bopo" typeface="Microsoft JhengHei"/>
+        <a:font script="Java" typeface="Javanese Text"/>
+        <a:font script="Lisu" typeface="Segoe UI"/>
+        <a:font script="Mymr" typeface="Myanmar Text"/>
+        <a:font script="Nkoo" typeface="Ebrima"/>
+        <a:font script="Olck" typeface="Nirmala UI"/>
+        <a:font script="Osma" typeface="Ebrima"/>
+        <a:font script="Phag" typeface="Phagspa"/>
+        <a:font script="Syrn" typeface="Estrangelo Edessa"/>
+        <a:font script="Syrj" typeface="Estrangelo Edessa"/>
+        <a:font script="Syre" typeface="Estrangelo Edessa"/>
+        <a:font script="Sora" typeface="Nirmala UI"/>
+        <a:font script="Tale" typeface="Microsoft Tai Le"/>
+        <a:font script="Talu" typeface="Microsoft New Tai Lue"/>
+        <a:font script="Tfng" typeface="Ebrima"/>
+      </a:minorFont>
+    </a:fontScheme>
+    <a:fmtScheme name="Office">
+      <a:fillStyleLst>
+        <a:solidFill>
+          <a:schemeClr val="phClr"/>
+        </a:solidFill>
+        <a:gradFill rotWithShape="1">
+          <a:gsLst>
+            <a:gs pos="0">
+              <a:schemeClr val="phClr">
+                <a:lumMod val="110000"/>
+                <a:satMod val="105000"/>
+                <a:tint val="67000"/>
+              </a:schemeClr>
+            </a:gs>
+            <a:gs pos="50000">
+              <a:schemeClr val="phClr">
+                <a:lumMod val="105000"/>
+                <a:satMod val="103000"/>
+                <a:tint val="73000"/>
+              </a:schemeClr>
+            </a:gs>
+            <a:gs pos="100000">
+              <a:schemeClr val="phClr">
+                <a:lumMod val="105000"/>
+                <a:satMod val="109000"/>
+                <a:tint val="81000"/>
+              </a:schemeClr>
+            </a:gs>
+          </a:gsLst>
+          <a:lin ang="5400000" scaled="0"/>
+        </a:gradFill>
+        <a:gradFill rotWithShape="1">
+          <a:gsLst>
+            <a:gs pos="0">
+              <a:schemeClr val="phClr">
+                <a:satMod val="103000"/>
+                <a:lumMod val="102000"/>
+                <a:tint val="94000"/>
+              </a:schemeClr>
+            </a:gs>
+            <a:gs pos="50000">
+              <a:schemeClr val="phClr">
+                <a:satMod val="110000"/>
+                <a:lumMod val="100000"/>
+                <a:shade val="100000"/>
+              </a:schemeClr>
+            </a:gs>
+            <a:gs pos="100000">
+              <a:schemeClr val="phClr">
+                <a:lumMod val="99000"/>
+                <a:satMod val="120000"/>
+                <a:shade val="78000"/>
+              </a:schemeClr>
+            </a:gs>
+          </a:gsLst>
+          <a:lin ang="5400000" scaled="0"/>
+        </a:gradFill>
+      </a:fillStyleLst>
+      <a:lnStyleLst>
+        <a:ln w="12700" cap="flat" cmpd="sng" algn="ctr">
+          <a:solidFill>
+            <a:schemeClr val="phClr"/>
+          </a:solidFill>
+          <a:prstDash val="solid"/>
+          <a:miter lim="800000"/>
+        </a:ln>
+        <a:ln w="19050" cap="flat" cmpd="sng" algn="ctr">
+          <a:solidFill>
+            <a:schemeClr val="phClr"/>
+          </a:solidFill>
+          <a:prstDash val="solid"/>
+          <a:miter lim="800000"/>
+        </a:ln>
+        <a:ln w="25400" cap="flat" cmpd="sng" algn="ctr">
+          <a:solidFill>
+            <a:schemeClr val="phClr"/>
+          </a:solidFill>
+          <a:prstDash val="solid"/>
+          <a:miter lim="800000"/>
+        </a:ln>
+      </a:lnStyleLst>
+      <a:effectStyleLst>
+        <a:effectStyle>
+          <a:effectLst/>
+        </a:effectStyle>
+        <a:effectStyle>
+          <a:effectLst/>
+        </a:effectStyle>
+        <a:effectStyle>
+          <a:effectLst>
+            <a:outerShdw blurRad="57150" dist="19050" dir="5400000" algn="ctr" rotWithShape="0">
+              <a:srgbClr val="000000">
+                <a:alpha val="63000"/>
+              </a:srgbClr>
+            </a:outerShdw>
+          </a:effectLst>
+        </a:effectStyle>
+      </a:effectStyleLst>
+      <a:bgFillStyleLst>
+        <a:solidFill>
+          <a:schemeClr val="phClr"/>
+        </a:solidFill>
+        <a:solidFill>
+          <a:schemeClr val="phClr">
+            <a:tint val="95000"/>
+            <a:satMod val="170000"/>
+          </a:schemeClr>
+        </a:solidFill>
+        <a:gradFill rotWithShape="1">
+          <a:gsLst>
+            <a:gs pos="0">
+              <a:schemeClr val="phClr">
+                <a:tint val="93000"/>
+                <a:satMod val="150000"/>
+                <a:shade val="98000"/>
+                <a:lumMod val="102000"/>
+              </a:schemeClr>
+            </a:gs>
+            <a:gs pos="50000">
+              <a:schemeClr val="phClr">
+                <a:tint val="98000"/>
+                <a:satMod val="130000"/>
+                <a:shade val="90000"/>
+                <a:lumMod val="103000"/>
+              </a:schemeClr>
+            </a:gs>
+            <a:gs pos="100000">
+              <a:schemeClr val="phClr">
+                <a:shade val="63000"/>
+                <a:satMod val="120000"/>
+              </a:schemeClr>
+            </a:gs>
+          </a:gsLst>
+          <a:lin ang="5400000" scaled="0"/>
+        </a:gradFill>
+      </a:bgFillStyleLst>
+    </a:fmtScheme>
+  </a:themeElements>
+  <a:objectDefaults>
+    <a:lnDef>
+      <a:spPr/>
+      <a:bodyPr/>
+      <a:lstStyle/>
+      <a:style>
+        <a:lnRef idx="2">
+          <a:schemeClr val="accent1"/>
+        </a:lnRef>
+        <a:fillRef idx="0">
+          <a:schemeClr val="accent1"/>
+        </a:fillRef>
+        <a:effectRef idx="1">
+          <a:schemeClr val="accent1"/>
+        </a:effectRef>
+        <a:fontRef idx="minor">
+          <a:schemeClr val="tx1"/>
+        </a:fontRef>
+      </a:style>
+    </a:lnDef>
+  </a:objectDefaults>
+  <a:extraClrSchemeLst/>
+  <a:extLst>
+    <a:ext uri="{05A4C25C-085E-4340-85A3-A5531E510DB2}">
+      <thm15:themeFamily xmlns:thm15="http://schemas.microsoft.com/office/thememl/2012/main" name="Office Theme" id="{2E142A2C-CD16-42D6-873A-C26D2A0506FA}" vid="{1BDDFF52-6CD6-40A5-AB3C-68EB2F1E4D0A}"/>
+    </a:ext>
+  </a:extLst>
+</a:theme>
 </file>